--- a/presentations/project1_presentation_requirements.pptx
+++ b/presentations/project1_presentation_requirements.pptx
@@ -1,24 +1,127 @@
 
 <file path=ppt/presentation.xml><?xml version="1.0" encoding="utf-8"?>
-<p:presentation xmlns:a="http://schemas.openxmlformats.org/drawingml/2006/main" xmlns:p="http://schemas.openxmlformats.org/presentationml/2006/main" xmlns:r="http://schemas.openxmlformats.org/officeDocument/2006/relationships" xmlns:p14="http://schemas.microsoft.com/office/powerpoint/2010/main" xmlns:p15="http://schemas.microsoft.com/office/powerpoint/2012/main" xmlns:mc="http://schemas.openxmlformats.org/markup-compatibility/2006">
+<p:presentation xmlns:a="http://schemas.openxmlformats.org/drawingml/2006/main" xmlns:r="http://schemas.openxmlformats.org/officeDocument/2006/relationships" xmlns:p="http://schemas.openxmlformats.org/presentationml/2006/main">
   <p:sldMasterIdLst>
-    <p:sldMasterId id="2147483648" r:id="rId2"/>
+    <p:sldMasterId id="2147483648" r:id="rId1"/>
   </p:sldMasterIdLst>
   <p:sldIdLst>
-    <p:sldId id="256" r:id="rId3"/>
-    <p:sldId id="257" r:id="rId4"/>
-    <p:sldId id="258" r:id="rId5"/>
-    <p:sldId id="259" r:id="rId6"/>
-    <p:sldId id="260" r:id="rId7"/>
-    <p:sldId id="261" r:id="rId8"/>
+    <p:sldId id="256" r:id="rId2"/>
+    <p:sldId id="257" r:id="rId3"/>
+    <p:sldId id="258" r:id="rId4"/>
+    <p:sldId id="265" r:id="rId5"/>
+    <p:sldId id="266" r:id="rId6"/>
+    <p:sldId id="267" r:id="rId7"/>
+    <p:sldId id="268" r:id="rId8"/>
+    <p:sldId id="269" r:id="rId9"/>
+    <p:sldId id="270" r:id="rId10"/>
+    <p:sldId id="271" r:id="rId11"/>
+    <p:sldId id="272" r:id="rId12"/>
+    <p:sldId id="260" r:id="rId13"/>
+    <p:sldId id="273" r:id="rId14"/>
+    <p:sldId id="264" r:id="rId15"/>
   </p:sldIdLst>
   <p:sldSz cx="10080625" cy="5670550"/>
   <p:notesSz cx="7772400" cy="10058400"/>
+  <p:defaultTextStyle>
+    <a:defPPr>
+      <a:defRPr lang="en-US"/>
+    </a:defPPr>
+    <a:lvl1pPr marL="0" algn="l" defTabSz="914400" rtl="0" eaLnBrk="1" latinLnBrk="0" hangingPunct="1">
+      <a:defRPr sz="1800" kern="1200">
+        <a:solidFill>
+          <a:schemeClr val="tx1"/>
+        </a:solidFill>
+        <a:latin typeface="+mn-lt"/>
+        <a:ea typeface="+mn-ea"/>
+        <a:cs typeface="+mn-cs"/>
+      </a:defRPr>
+    </a:lvl1pPr>
+    <a:lvl2pPr marL="457200" algn="l" defTabSz="914400" rtl="0" eaLnBrk="1" latinLnBrk="0" hangingPunct="1">
+      <a:defRPr sz="1800" kern="1200">
+        <a:solidFill>
+          <a:schemeClr val="tx1"/>
+        </a:solidFill>
+        <a:latin typeface="+mn-lt"/>
+        <a:ea typeface="+mn-ea"/>
+        <a:cs typeface="+mn-cs"/>
+      </a:defRPr>
+    </a:lvl2pPr>
+    <a:lvl3pPr marL="914400" algn="l" defTabSz="914400" rtl="0" eaLnBrk="1" latinLnBrk="0" hangingPunct="1">
+      <a:defRPr sz="1800" kern="1200">
+        <a:solidFill>
+          <a:schemeClr val="tx1"/>
+        </a:solidFill>
+        <a:latin typeface="+mn-lt"/>
+        <a:ea typeface="+mn-ea"/>
+        <a:cs typeface="+mn-cs"/>
+      </a:defRPr>
+    </a:lvl3pPr>
+    <a:lvl4pPr marL="1371600" algn="l" defTabSz="914400" rtl="0" eaLnBrk="1" latinLnBrk="0" hangingPunct="1">
+      <a:defRPr sz="1800" kern="1200">
+        <a:solidFill>
+          <a:schemeClr val="tx1"/>
+        </a:solidFill>
+        <a:latin typeface="+mn-lt"/>
+        <a:ea typeface="+mn-ea"/>
+        <a:cs typeface="+mn-cs"/>
+      </a:defRPr>
+    </a:lvl4pPr>
+    <a:lvl5pPr marL="1828800" algn="l" defTabSz="914400" rtl="0" eaLnBrk="1" latinLnBrk="0" hangingPunct="1">
+      <a:defRPr sz="1800" kern="1200">
+        <a:solidFill>
+          <a:schemeClr val="tx1"/>
+        </a:solidFill>
+        <a:latin typeface="+mn-lt"/>
+        <a:ea typeface="+mn-ea"/>
+        <a:cs typeface="+mn-cs"/>
+      </a:defRPr>
+    </a:lvl5pPr>
+    <a:lvl6pPr marL="2286000" algn="l" defTabSz="914400" rtl="0" eaLnBrk="1" latinLnBrk="0" hangingPunct="1">
+      <a:defRPr sz="1800" kern="1200">
+        <a:solidFill>
+          <a:schemeClr val="tx1"/>
+        </a:solidFill>
+        <a:latin typeface="+mn-lt"/>
+        <a:ea typeface="+mn-ea"/>
+        <a:cs typeface="+mn-cs"/>
+      </a:defRPr>
+    </a:lvl6pPr>
+    <a:lvl7pPr marL="2743200" algn="l" defTabSz="914400" rtl="0" eaLnBrk="1" latinLnBrk="0" hangingPunct="1">
+      <a:defRPr sz="1800" kern="1200">
+        <a:solidFill>
+          <a:schemeClr val="tx1"/>
+        </a:solidFill>
+        <a:latin typeface="+mn-lt"/>
+        <a:ea typeface="+mn-ea"/>
+        <a:cs typeface="+mn-cs"/>
+      </a:defRPr>
+    </a:lvl7pPr>
+    <a:lvl8pPr marL="3200400" algn="l" defTabSz="914400" rtl="0" eaLnBrk="1" latinLnBrk="0" hangingPunct="1">
+      <a:defRPr sz="1800" kern="1200">
+        <a:solidFill>
+          <a:schemeClr val="tx1"/>
+        </a:solidFill>
+        <a:latin typeface="+mn-lt"/>
+        <a:ea typeface="+mn-ea"/>
+        <a:cs typeface="+mn-cs"/>
+      </a:defRPr>
+    </a:lvl8pPr>
+    <a:lvl9pPr marL="3657600" algn="l" defTabSz="914400" rtl="0" eaLnBrk="1" latinLnBrk="0" hangingPunct="1">
+      <a:defRPr sz="1800" kern="1200">
+        <a:solidFill>
+          <a:schemeClr val="tx1"/>
+        </a:solidFill>
+        <a:latin typeface="+mn-lt"/>
+        <a:ea typeface="+mn-ea"/>
+        <a:cs typeface="+mn-cs"/>
+      </a:defRPr>
+    </a:lvl9pPr>
+  </p:defaultTextStyle>
 </p:presentation>
 </file>
 
 <file path=ppt/slideLayouts/slideLayout1.xml><?xml version="1.0" encoding="utf-8"?>
-<p:sldLayout xmlns:a="http://schemas.openxmlformats.org/drawingml/2006/main" xmlns:p="http://schemas.openxmlformats.org/presentationml/2006/main" xmlns:r="http://schemas.openxmlformats.org/officeDocument/2006/relationships" xmlns:p14="http://schemas.microsoft.com/office/powerpoint/2010/main" xmlns:p15="http://schemas.microsoft.com/office/powerpoint/2012/main" xmlns:mc="http://schemas.openxmlformats.org/markup-compatibility/2006" type="tx" preserve="1">
+<p:sldLayout xmlns:a="http://schemas.openxmlformats.org/drawingml/2006/main" xmlns:r="http://schemas.openxmlformats.org/officeDocument/2006/relationships" xmlns:p="http://schemas.openxmlformats.org/presentationml/2006/main" type="tx" preserve="1">
   <p:cSld name="Default">
     <p:spTree>
       <p:nvGrpSpPr>
@@ -61,6 +164,7 @@
           <a:bodyPr lIns="0" tIns="0" rIns="0" bIns="0" anchor="ctr">
             <a:spAutoFit/>
           </a:bodyPr>
+          <a:lstStyle/>
           <a:p>
             <a:pPr indent="0" algn="ctr">
               <a:buNone/>
@@ -103,6 +207,7 @@
           <a:bodyPr lIns="0" tIns="0" rIns="0" bIns="0" anchor="t">
             <a:normAutofit/>
           </a:bodyPr>
+          <a:lstStyle/>
           <a:p>
             <a:pPr indent="0" algn="l">
               <a:spcBef>
@@ -134,6 +239,7 @@
         <p:spPr/>
         <p:txBody>
           <a:bodyPr/>
+          <a:lstStyle/>
           <a:p>
             <a:r>
               <a:t>Footer</a:t>
@@ -154,10 +260,12 @@
         <p:spPr/>
         <p:txBody>
           <a:bodyPr/>
+          <a:lstStyle/>
           <a:p>
             <a:fld id="{1728DDBA-A667-43B9-884B-6CE061A5178A}" type="slidenum">
-              <a:t>&lt;#&gt;</a:t>
+              <a:t>‹#›</a:t>
             </a:fld>
+            <a:endParaRPr/>
           </a:p>
         </p:txBody>
       </p:sp>
@@ -174,21 +282,22 @@
         <p:spPr/>
         <p:txBody>
           <a:bodyPr/>
-          <a:p>
-            <a:r>
-              <a:rPr lang="en-US"/>
-              <a:t/>
-            </a:r>
+          <a:lstStyle/>
+          <a:p>
+            <a:endParaRPr/>
           </a:p>
         </p:txBody>
       </p:sp>
     </p:spTree>
   </p:cSld>
+  <p:clrMapOvr>
+    <a:masterClrMapping/>
+  </p:clrMapOvr>
 </p:sldLayout>
 </file>
 
 <file path=ppt/slideLayouts/slideLayout2.xml><?xml version="1.0" encoding="utf-8"?>
-<p:sldLayout xmlns:a="http://schemas.openxmlformats.org/drawingml/2006/main" xmlns:p="http://schemas.openxmlformats.org/presentationml/2006/main" xmlns:r="http://schemas.openxmlformats.org/officeDocument/2006/relationships" xmlns:p14="http://schemas.microsoft.com/office/powerpoint/2010/main" xmlns:p15="http://schemas.microsoft.com/office/powerpoint/2012/main" xmlns:mc="http://schemas.openxmlformats.org/markup-compatibility/2006" type="title" preserve="1">
+<p:sldLayout xmlns:a="http://schemas.openxmlformats.org/drawingml/2006/main" xmlns:r="http://schemas.openxmlformats.org/officeDocument/2006/relationships" xmlns:p="http://schemas.openxmlformats.org/presentationml/2006/main" type="title" preserve="1">
   <p:cSld name="Default">
     <p:spTree>
       <p:nvGrpSpPr>
@@ -231,6 +340,7 @@
           <a:bodyPr lIns="0" tIns="0" rIns="0" bIns="0" anchor="ctr">
             <a:spAutoFit/>
           </a:bodyPr>
+          <a:lstStyle/>
           <a:p>
             <a:pPr indent="0" algn="ctr">
               <a:buNone/>
@@ -273,6 +383,7 @@
           <a:bodyPr lIns="0" tIns="0" rIns="0" bIns="0" anchor="ctr">
             <a:spAutoFit/>
           </a:bodyPr>
+          <a:lstStyle/>
           <a:p>
             <a:pPr indent="0" algn="ctr">
               <a:buNone/>
@@ -301,6 +412,7 @@
         <p:spPr/>
         <p:txBody>
           <a:bodyPr/>
+          <a:lstStyle/>
           <a:p>
             <a:r>
               <a:t>Footer</a:t>
@@ -321,10 +433,12 @@
         <p:spPr/>
         <p:txBody>
           <a:bodyPr/>
+          <a:lstStyle/>
           <a:p>
             <a:fld id="{E76414E5-9650-4418-998D-24BF0B5576F4}" type="slidenum">
-              <a:t>&lt;#&gt;</a:t>
+              <a:t>‹#›</a:t>
             </a:fld>
+            <a:endParaRPr/>
           </a:p>
         </p:txBody>
       </p:sp>
@@ -341,22 +455,293 @@
         <p:spPr/>
         <p:txBody>
           <a:bodyPr/>
-          <a:p>
-            <a:r>
-              <a:rPr lang="en-US"/>
-              <a:t/>
-            </a:r>
+          <a:lstStyle/>
+          <a:p>
+            <a:endParaRPr/>
           </a:p>
         </p:txBody>
       </p:sp>
     </p:spTree>
   </p:cSld>
+  <p:clrMapOvr>
+    <a:masterClrMapping/>
+  </p:clrMapOvr>
+</p:sldLayout>
+</file>
+
+<file path=ppt/slideLayouts/slideLayout3.xml><?xml version="1.0" encoding="utf-8"?>
+<p:sldLayout xmlns:a="http://schemas.openxmlformats.org/drawingml/2006/main" xmlns:r="http://schemas.openxmlformats.org/officeDocument/2006/relationships" xmlns:p="http://schemas.openxmlformats.org/presentationml/2006/main" type="twoObj">
+  <p:cSld name="Two Content">
+    <p:spTree>
+      <p:nvGrpSpPr>
+        <p:cNvPr id="1" name=""/>
+        <p:cNvGrpSpPr/>
+        <p:nvPr/>
+      </p:nvGrpSpPr>
+      <p:grpSpPr>
+        <a:xfrm>
+          <a:off x="0" y="0"/>
+          <a:ext cx="0" cy="0"/>
+          <a:chOff x="0" y="0"/>
+          <a:chExt cx="0" cy="0"/>
+        </a:xfrm>
+      </p:grpSpPr>
+      <p:sp>
+        <p:nvSpPr>
+          <p:cNvPr id="2" name="Title 1">
+            <a:extLst>
+              <a:ext uri="{FF2B5EF4-FFF2-40B4-BE49-F238E27FC236}">
+                <a16:creationId xmlns:a16="http://schemas.microsoft.com/office/drawing/2014/main" id="{3E2D35B5-2182-0B38-05DC-0415895F75D8}"/>
+              </a:ext>
+            </a:extLst>
+          </p:cNvPr>
+          <p:cNvSpPr>
+            <a:spLocks noGrp="1"/>
+          </p:cNvSpPr>
+          <p:nvPr>
+            <p:ph type="title"/>
+          </p:nvPr>
+        </p:nvSpPr>
+        <p:spPr/>
+        <p:txBody>
+          <a:bodyPr/>
+          <a:lstStyle/>
+          <a:p>
+            <a:r>
+              <a:rPr lang="en-US"/>
+              <a:t>Click to edit Master title style</a:t>
+            </a:r>
+          </a:p>
+        </p:txBody>
+      </p:sp>
+      <p:sp>
+        <p:nvSpPr>
+          <p:cNvPr id="3" name="Content Placeholder 2">
+            <a:extLst>
+              <a:ext uri="{FF2B5EF4-FFF2-40B4-BE49-F238E27FC236}">
+                <a16:creationId xmlns:a16="http://schemas.microsoft.com/office/drawing/2014/main" id="{BB23C9FF-878D-CE12-9A00-3F75151C14A9}"/>
+              </a:ext>
+            </a:extLst>
+          </p:cNvPr>
+          <p:cNvSpPr>
+            <a:spLocks noGrp="1"/>
+          </p:cNvSpPr>
+          <p:nvPr>
+            <p:ph sz="half" idx="1"/>
+          </p:nvPr>
+        </p:nvSpPr>
+        <p:spPr>
+          <a:xfrm>
+            <a:off x="693043" y="1509521"/>
+            <a:ext cx="4284266" cy="3597912"/>
+          </a:xfrm>
+        </p:spPr>
+        <p:txBody>
+          <a:bodyPr/>
+          <a:lstStyle/>
+          <a:p>
+            <a:pPr lvl="0"/>
+            <a:r>
+              <a:rPr lang="en-US"/>
+              <a:t>Click to edit Master text styles</a:t>
+            </a:r>
+          </a:p>
+          <a:p>
+            <a:pPr lvl="1"/>
+            <a:r>
+              <a:rPr lang="en-US"/>
+              <a:t>Second level</a:t>
+            </a:r>
+          </a:p>
+          <a:p>
+            <a:pPr lvl="2"/>
+            <a:r>
+              <a:rPr lang="en-US"/>
+              <a:t>Third level</a:t>
+            </a:r>
+          </a:p>
+          <a:p>
+            <a:pPr lvl="3"/>
+            <a:r>
+              <a:rPr lang="en-US"/>
+              <a:t>Fourth level</a:t>
+            </a:r>
+          </a:p>
+          <a:p>
+            <a:pPr lvl="4"/>
+            <a:r>
+              <a:rPr lang="en-US"/>
+              <a:t>Fifth level</a:t>
+            </a:r>
+          </a:p>
+        </p:txBody>
+      </p:sp>
+      <p:sp>
+        <p:nvSpPr>
+          <p:cNvPr id="4" name="Content Placeholder 3">
+            <a:extLst>
+              <a:ext uri="{FF2B5EF4-FFF2-40B4-BE49-F238E27FC236}">
+                <a16:creationId xmlns:a16="http://schemas.microsoft.com/office/drawing/2014/main" id="{DD3167D7-83DB-6EB8-B848-0D25C1F32382}"/>
+              </a:ext>
+            </a:extLst>
+          </p:cNvPr>
+          <p:cNvSpPr>
+            <a:spLocks noGrp="1"/>
+          </p:cNvSpPr>
+          <p:nvPr>
+            <p:ph sz="half" idx="2"/>
+          </p:nvPr>
+        </p:nvSpPr>
+        <p:spPr>
+          <a:xfrm>
+            <a:off x="5103316" y="1509521"/>
+            <a:ext cx="4284266" cy="3597912"/>
+          </a:xfrm>
+        </p:spPr>
+        <p:txBody>
+          <a:bodyPr/>
+          <a:lstStyle/>
+          <a:p>
+            <a:pPr lvl="0"/>
+            <a:r>
+              <a:rPr lang="en-US"/>
+              <a:t>Click to edit Master text styles</a:t>
+            </a:r>
+          </a:p>
+          <a:p>
+            <a:pPr lvl="1"/>
+            <a:r>
+              <a:rPr lang="en-US"/>
+              <a:t>Second level</a:t>
+            </a:r>
+          </a:p>
+          <a:p>
+            <a:pPr lvl="2"/>
+            <a:r>
+              <a:rPr lang="en-US"/>
+              <a:t>Third level</a:t>
+            </a:r>
+          </a:p>
+          <a:p>
+            <a:pPr lvl="3"/>
+            <a:r>
+              <a:rPr lang="en-US"/>
+              <a:t>Fourth level</a:t>
+            </a:r>
+          </a:p>
+          <a:p>
+            <a:pPr lvl="4"/>
+            <a:r>
+              <a:rPr lang="en-US"/>
+              <a:t>Fifth level</a:t>
+            </a:r>
+          </a:p>
+        </p:txBody>
+      </p:sp>
+      <p:sp>
+        <p:nvSpPr>
+          <p:cNvPr id="5" name="Date Placeholder 4">
+            <a:extLst>
+              <a:ext uri="{FF2B5EF4-FFF2-40B4-BE49-F238E27FC236}">
+                <a16:creationId xmlns:a16="http://schemas.microsoft.com/office/drawing/2014/main" id="{CBCE72AC-77FC-946C-1477-E8A25B0597FC}"/>
+              </a:ext>
+            </a:extLst>
+          </p:cNvPr>
+          <p:cNvSpPr>
+            <a:spLocks noGrp="1"/>
+          </p:cNvSpPr>
+          <p:nvPr>
+            <p:ph type="dt" sz="half" idx="10"/>
+          </p:nvPr>
+        </p:nvSpPr>
+        <p:spPr/>
+        <p:txBody>
+          <a:bodyPr/>
+          <a:lstStyle/>
+          <a:p>
+            <a:fld id="{72E2144D-7780-48FB-8089-4A94ABE79683}" type="datetimeFigureOut">
+              <a:rPr lang="en-US" smtClean="0"/>
+              <a:t>6/11/2026</a:t>
+            </a:fld>
+            <a:endParaRPr lang="en-US"/>
+          </a:p>
+        </p:txBody>
+      </p:sp>
+      <p:sp>
+        <p:nvSpPr>
+          <p:cNvPr id="6" name="Footer Placeholder 5">
+            <a:extLst>
+              <a:ext uri="{FF2B5EF4-FFF2-40B4-BE49-F238E27FC236}">
+                <a16:creationId xmlns:a16="http://schemas.microsoft.com/office/drawing/2014/main" id="{47627281-2B59-4EAF-EEA2-A789373246D8}"/>
+              </a:ext>
+            </a:extLst>
+          </p:cNvPr>
+          <p:cNvSpPr>
+            <a:spLocks noGrp="1"/>
+          </p:cNvSpPr>
+          <p:nvPr>
+            <p:ph type="ftr" sz="quarter" idx="11"/>
+          </p:nvPr>
+        </p:nvSpPr>
+        <p:spPr/>
+        <p:txBody>
+          <a:bodyPr/>
+          <a:lstStyle/>
+          <a:p>
+            <a:endParaRPr lang="en-US"/>
+          </a:p>
+        </p:txBody>
+      </p:sp>
+      <p:sp>
+        <p:nvSpPr>
+          <p:cNvPr id="7" name="Slide Number Placeholder 6">
+            <a:extLst>
+              <a:ext uri="{FF2B5EF4-FFF2-40B4-BE49-F238E27FC236}">
+                <a16:creationId xmlns:a16="http://schemas.microsoft.com/office/drawing/2014/main" id="{EB23A5B9-9641-A710-0891-DFFFC427CAE9}"/>
+              </a:ext>
+            </a:extLst>
+          </p:cNvPr>
+          <p:cNvSpPr>
+            <a:spLocks noGrp="1"/>
+          </p:cNvSpPr>
+          <p:nvPr>
+            <p:ph type="sldNum" sz="quarter" idx="12"/>
+          </p:nvPr>
+        </p:nvSpPr>
+        <p:spPr/>
+        <p:txBody>
+          <a:bodyPr/>
+          <a:lstStyle/>
+          <a:p>
+            <a:fld id="{4A2ABCCF-61B3-4AEB-8CCB-FDD87955C44D}" type="slidenum">
+              <a:rPr lang="en-US" smtClean="0"/>
+              <a:t>‹#›</a:t>
+            </a:fld>
+            <a:endParaRPr lang="en-US"/>
+          </a:p>
+        </p:txBody>
+      </p:sp>
+    </p:spTree>
+    <p:extLst>
+      <p:ext uri="{BB962C8B-B14F-4D97-AF65-F5344CB8AC3E}">
+        <p14:creationId xmlns:p14="http://schemas.microsoft.com/office/powerpoint/2010/main" val="46946296"/>
+      </p:ext>
+    </p:extLst>
+  </p:cSld>
+  <p:clrMapOvr>
+    <a:masterClrMapping/>
+  </p:clrMapOvr>
 </p:sldLayout>
 </file>
 
 <file path=ppt/slideMasters/slideMaster1.xml><?xml version="1.0" encoding="utf-8"?>
-<p:sldMaster xmlns:a="http://schemas.openxmlformats.org/drawingml/2006/main" xmlns:p="http://schemas.openxmlformats.org/presentationml/2006/main" xmlns:r="http://schemas.openxmlformats.org/officeDocument/2006/relationships" xmlns:p14="http://schemas.microsoft.com/office/powerpoint/2010/main" xmlns:p15="http://schemas.microsoft.com/office/powerpoint/2012/main" xmlns:mc="http://schemas.openxmlformats.org/markup-compatibility/2006">
+<p:sldMaster xmlns:a="http://schemas.openxmlformats.org/drawingml/2006/main" xmlns:r="http://schemas.openxmlformats.org/officeDocument/2006/relationships" xmlns:p="http://schemas.openxmlformats.org/presentationml/2006/main">
   <p:cSld>
+    <p:bg>
+      <p:bgRef idx="1001">
+        <a:schemeClr val="bg1"/>
+      </p:bgRef>
+    </p:bg>
     <p:spTree>
       <p:nvGrpSpPr>
         <p:cNvPr id="1" name=""/>
@@ -426,14 +811,6 @@
               </a:rPr>
               <a:t>Click to edit the title text format</a:t>
             </a:r>
-            <a:endParaRPr lang="en-US" sz="4400" b="0" u="none" strike="noStrike">
-              <a:solidFill>
-                <a:srgbClr val="000000"/>
-              </a:solidFill>
-              <a:effectLst/>
-              <a:uFillTx/>
-              <a:latin typeface="Arial"/>
-            </a:endParaRPr>
           </a:p>
         </p:txBody>
       </p:sp>
@@ -622,14 +999,6 @@
               </a:rPr>
               <a:t>Click to edit the outline text format</a:t>
             </a:r>
-            <a:endParaRPr lang="en-US" sz="3200" b="0" u="none" strike="noStrike">
-              <a:solidFill>
-                <a:srgbClr val="000000"/>
-              </a:solidFill>
-              <a:effectLst/>
-              <a:uFillTx/>
-              <a:latin typeface="Arial"/>
-            </a:endParaRPr>
           </a:p>
           <a:p>
             <a:pPr marL="864000" lvl="1" indent="-324000" algn="l">
@@ -654,14 +1023,6 @@
               </a:rPr>
               <a:t>Second Outline Level</a:t>
             </a:r>
-            <a:endParaRPr lang="en-US" sz="2800" b="0" u="none" strike="noStrike">
-              <a:solidFill>
-                <a:srgbClr val="000000"/>
-              </a:solidFill>
-              <a:effectLst/>
-              <a:uFillTx/>
-              <a:latin typeface="Arial"/>
-            </a:endParaRPr>
           </a:p>
           <a:p>
             <a:pPr marL="1296000" lvl="2" indent="-288000" algn="l">
@@ -686,14 +1047,6 @@
               </a:rPr>
               <a:t>Third Outline Level</a:t>
             </a:r>
-            <a:endParaRPr lang="en-US" sz="2400" b="0" u="none" strike="noStrike">
-              <a:solidFill>
-                <a:srgbClr val="000000"/>
-              </a:solidFill>
-              <a:effectLst/>
-              <a:uFillTx/>
-              <a:latin typeface="Arial"/>
-            </a:endParaRPr>
           </a:p>
           <a:p>
             <a:pPr marL="1728000" lvl="3" indent="-216000" algn="l">
@@ -718,14 +1071,6 @@
               </a:rPr>
               <a:t>Fourth Outline Level</a:t>
             </a:r>
-            <a:endParaRPr lang="en-US" sz="2000" b="0" u="none" strike="noStrike">
-              <a:solidFill>
-                <a:srgbClr val="000000"/>
-              </a:solidFill>
-              <a:effectLst/>
-              <a:uFillTx/>
-              <a:latin typeface="Arial"/>
-            </a:endParaRPr>
           </a:p>
           <a:p>
             <a:pPr marL="2160000" lvl="4" indent="-216000" algn="l">
@@ -750,14 +1095,6 @@
               </a:rPr>
               <a:t>Fifth Outline Level</a:t>
             </a:r>
-            <a:endParaRPr lang="en-US" sz="2000" b="0" u="none" strike="noStrike">
-              <a:solidFill>
-                <a:srgbClr val="000000"/>
-              </a:solidFill>
-              <a:effectLst/>
-              <a:uFillTx/>
-              <a:latin typeface="Arial"/>
-            </a:endParaRPr>
           </a:p>
           <a:p>
             <a:pPr marL="2592000" lvl="5" indent="-216000" algn="l">
@@ -782,14 +1119,6 @@
               </a:rPr>
               <a:t>Sixth Outline Level</a:t>
             </a:r>
-            <a:endParaRPr lang="en-US" sz="2000" b="0" u="none" strike="noStrike">
-              <a:solidFill>
-                <a:srgbClr val="000000"/>
-              </a:solidFill>
-              <a:effectLst/>
-              <a:uFillTx/>
-              <a:latin typeface="Arial"/>
-            </a:endParaRPr>
           </a:p>
           <a:p>
             <a:pPr marL="3024000" lvl="6" indent="-216000" algn="l">
@@ -814,14 +1143,6 @@
               </a:rPr>
               <a:t>Seventh Outline Level</a:t>
             </a:r>
-            <a:endParaRPr lang="en-US" sz="2000" b="0" u="none" strike="noStrike">
-              <a:solidFill>
-                <a:srgbClr val="000000"/>
-              </a:solidFill>
-              <a:effectLst/>
-              <a:uFillTx/>
-              <a:latin typeface="Arial"/>
-            </a:endParaRPr>
           </a:p>
         </p:txBody>
       </p:sp>
@@ -880,14 +1201,6 @@
               </a:rPr>
               <a:t>&lt;date/time&gt;</a:t>
             </a:r>
-            <a:endParaRPr lang="en-US" sz="1400" b="0" u="none" strike="noStrike">
-              <a:solidFill>
-                <a:srgbClr val="000000"/>
-              </a:solidFill>
-              <a:effectLst/>
-              <a:uFillTx/>
-              <a:latin typeface="Times New Roman"/>
-            </a:endParaRPr>
           </a:p>
         </p:txBody>
       </p:sp>
@@ -946,14 +1259,6 @@
               </a:rPr>
               <a:t>&lt;footer&gt;</a:t>
             </a:r>
-            <a:endParaRPr lang="en-US" sz="1400" b="0" u="none" strike="noStrike">
-              <a:solidFill>
-                <a:srgbClr val="000000"/>
-              </a:solidFill>
-              <a:effectLst/>
-              <a:uFillTx/>
-              <a:latin typeface="Times New Roman"/>
-            </a:endParaRPr>
           </a:p>
         </p:txBody>
       </p:sp>
@@ -1010,7 +1315,7 @@
                 <a:uFillTx/>
                 <a:latin typeface="Times New Roman"/>
               </a:rPr>
-              <a:t>&lt;number&gt;</a:t>
+              <a:t>‹#›</a:t>
             </a:fld>
             <a:endParaRPr lang="en-US" sz="1400" b="0" u="none" strike="noStrike">
               <a:solidFill>
@@ -1027,14 +1332,295 @@
   </p:cSld>
   <p:clrMap bg1="lt1" tx1="dk1" bg2="lt2" tx2="dk2" accent1="accent1" accent2="accent2" accent3="accent3" accent4="accent4" accent5="accent5" accent6="accent6" hlink="hlink" folHlink="folHlink"/>
   <p:sldLayoutIdLst>
-    <p:sldLayoutId id="2147483649" r:id="rId2"/>
-    <p:sldLayoutId id="2147483650" r:id="rId3"/>
+    <p:sldLayoutId id="2147483649" r:id="rId1"/>
+    <p:sldLayoutId id="2147483650" r:id="rId2"/>
+    <p:sldLayoutId id="2147483651" r:id="rId3"/>
   </p:sldLayoutIdLst>
+  <p:txStyles>
+    <p:titleStyle>
+      <a:lvl1pPr algn="l" defTabSz="914400" rtl="0" eaLnBrk="1" latinLnBrk="0" hangingPunct="1">
+        <a:lnSpc>
+          <a:spcPct val="90000"/>
+        </a:lnSpc>
+        <a:spcBef>
+          <a:spcPct val="0"/>
+        </a:spcBef>
+        <a:buNone/>
+        <a:defRPr sz="4400" kern="1200">
+          <a:solidFill>
+            <a:schemeClr val="tx1"/>
+          </a:solidFill>
+          <a:latin typeface="+mj-lt"/>
+          <a:ea typeface="+mj-ea"/>
+          <a:cs typeface="+mj-cs"/>
+        </a:defRPr>
+      </a:lvl1pPr>
+    </p:titleStyle>
+    <p:bodyStyle>
+      <a:lvl1pPr marL="228600" indent="-228600" algn="l" defTabSz="914400" rtl="0" eaLnBrk="1" latinLnBrk="0" hangingPunct="1">
+        <a:lnSpc>
+          <a:spcPct val="90000"/>
+        </a:lnSpc>
+        <a:spcBef>
+          <a:spcPts val="1000"/>
+        </a:spcBef>
+        <a:buFont typeface="Arial" panose="020B0604020202020204" pitchFamily="34" charset="0"/>
+        <a:buChar char="•"/>
+        <a:defRPr sz="2800" kern="1200">
+          <a:solidFill>
+            <a:schemeClr val="tx1"/>
+          </a:solidFill>
+          <a:latin typeface="+mn-lt"/>
+          <a:ea typeface="+mn-ea"/>
+          <a:cs typeface="+mn-cs"/>
+        </a:defRPr>
+      </a:lvl1pPr>
+      <a:lvl2pPr marL="685800" indent="-228600" algn="l" defTabSz="914400" rtl="0" eaLnBrk="1" latinLnBrk="0" hangingPunct="1">
+        <a:lnSpc>
+          <a:spcPct val="90000"/>
+        </a:lnSpc>
+        <a:spcBef>
+          <a:spcPts val="500"/>
+        </a:spcBef>
+        <a:buFont typeface="Arial" panose="020B0604020202020204" pitchFamily="34" charset="0"/>
+        <a:buChar char="•"/>
+        <a:defRPr sz="2400" kern="1200">
+          <a:solidFill>
+            <a:schemeClr val="tx1"/>
+          </a:solidFill>
+          <a:latin typeface="+mn-lt"/>
+          <a:ea typeface="+mn-ea"/>
+          <a:cs typeface="+mn-cs"/>
+        </a:defRPr>
+      </a:lvl2pPr>
+      <a:lvl3pPr marL="1143000" indent="-228600" algn="l" defTabSz="914400" rtl="0" eaLnBrk="1" latinLnBrk="0" hangingPunct="1">
+        <a:lnSpc>
+          <a:spcPct val="90000"/>
+        </a:lnSpc>
+        <a:spcBef>
+          <a:spcPts val="500"/>
+        </a:spcBef>
+        <a:buFont typeface="Arial" panose="020B0604020202020204" pitchFamily="34" charset="0"/>
+        <a:buChar char="•"/>
+        <a:defRPr sz="2000" kern="1200">
+          <a:solidFill>
+            <a:schemeClr val="tx1"/>
+          </a:solidFill>
+          <a:latin typeface="+mn-lt"/>
+          <a:ea typeface="+mn-ea"/>
+          <a:cs typeface="+mn-cs"/>
+        </a:defRPr>
+      </a:lvl3pPr>
+      <a:lvl4pPr marL="1600200" indent="-228600" algn="l" defTabSz="914400" rtl="0" eaLnBrk="1" latinLnBrk="0" hangingPunct="1">
+        <a:lnSpc>
+          <a:spcPct val="90000"/>
+        </a:lnSpc>
+        <a:spcBef>
+          <a:spcPts val="500"/>
+        </a:spcBef>
+        <a:buFont typeface="Arial" panose="020B0604020202020204" pitchFamily="34" charset="0"/>
+        <a:buChar char="•"/>
+        <a:defRPr sz="1800" kern="1200">
+          <a:solidFill>
+            <a:schemeClr val="tx1"/>
+          </a:solidFill>
+          <a:latin typeface="+mn-lt"/>
+          <a:ea typeface="+mn-ea"/>
+          <a:cs typeface="+mn-cs"/>
+        </a:defRPr>
+      </a:lvl4pPr>
+      <a:lvl5pPr marL="2057400" indent="-228600" algn="l" defTabSz="914400" rtl="0" eaLnBrk="1" latinLnBrk="0" hangingPunct="1">
+        <a:lnSpc>
+          <a:spcPct val="90000"/>
+        </a:lnSpc>
+        <a:spcBef>
+          <a:spcPts val="500"/>
+        </a:spcBef>
+        <a:buFont typeface="Arial" panose="020B0604020202020204" pitchFamily="34" charset="0"/>
+        <a:buChar char="•"/>
+        <a:defRPr sz="1800" kern="1200">
+          <a:solidFill>
+            <a:schemeClr val="tx1"/>
+          </a:solidFill>
+          <a:latin typeface="+mn-lt"/>
+          <a:ea typeface="+mn-ea"/>
+          <a:cs typeface="+mn-cs"/>
+        </a:defRPr>
+      </a:lvl5pPr>
+      <a:lvl6pPr marL="2514600" indent="-228600" algn="l" defTabSz="914400" rtl="0" eaLnBrk="1" latinLnBrk="0" hangingPunct="1">
+        <a:lnSpc>
+          <a:spcPct val="90000"/>
+        </a:lnSpc>
+        <a:spcBef>
+          <a:spcPts val="500"/>
+        </a:spcBef>
+        <a:buFont typeface="Arial" panose="020B0604020202020204" pitchFamily="34" charset="0"/>
+        <a:buChar char="•"/>
+        <a:defRPr sz="1800" kern="1200">
+          <a:solidFill>
+            <a:schemeClr val="tx1"/>
+          </a:solidFill>
+          <a:latin typeface="+mn-lt"/>
+          <a:ea typeface="+mn-ea"/>
+          <a:cs typeface="+mn-cs"/>
+        </a:defRPr>
+      </a:lvl6pPr>
+      <a:lvl7pPr marL="2971800" indent="-228600" algn="l" defTabSz="914400" rtl="0" eaLnBrk="1" latinLnBrk="0" hangingPunct="1">
+        <a:lnSpc>
+          <a:spcPct val="90000"/>
+        </a:lnSpc>
+        <a:spcBef>
+          <a:spcPts val="500"/>
+        </a:spcBef>
+        <a:buFont typeface="Arial" panose="020B0604020202020204" pitchFamily="34" charset="0"/>
+        <a:buChar char="•"/>
+        <a:defRPr sz="1800" kern="1200">
+          <a:solidFill>
+            <a:schemeClr val="tx1"/>
+          </a:solidFill>
+          <a:latin typeface="+mn-lt"/>
+          <a:ea typeface="+mn-ea"/>
+          <a:cs typeface="+mn-cs"/>
+        </a:defRPr>
+      </a:lvl7pPr>
+      <a:lvl8pPr marL="3429000" indent="-228600" algn="l" defTabSz="914400" rtl="0" eaLnBrk="1" latinLnBrk="0" hangingPunct="1">
+        <a:lnSpc>
+          <a:spcPct val="90000"/>
+        </a:lnSpc>
+        <a:spcBef>
+          <a:spcPts val="500"/>
+        </a:spcBef>
+        <a:buFont typeface="Arial" panose="020B0604020202020204" pitchFamily="34" charset="0"/>
+        <a:buChar char="•"/>
+        <a:defRPr sz="1800" kern="1200">
+          <a:solidFill>
+            <a:schemeClr val="tx1"/>
+          </a:solidFill>
+          <a:latin typeface="+mn-lt"/>
+          <a:ea typeface="+mn-ea"/>
+          <a:cs typeface="+mn-cs"/>
+        </a:defRPr>
+      </a:lvl8pPr>
+      <a:lvl9pPr marL="3886200" indent="-228600" algn="l" defTabSz="914400" rtl="0" eaLnBrk="1" latinLnBrk="0" hangingPunct="1">
+        <a:lnSpc>
+          <a:spcPct val="90000"/>
+        </a:lnSpc>
+        <a:spcBef>
+          <a:spcPts val="500"/>
+        </a:spcBef>
+        <a:buFont typeface="Arial" panose="020B0604020202020204" pitchFamily="34" charset="0"/>
+        <a:buChar char="•"/>
+        <a:defRPr sz="1800" kern="1200">
+          <a:solidFill>
+            <a:schemeClr val="tx1"/>
+          </a:solidFill>
+          <a:latin typeface="+mn-lt"/>
+          <a:ea typeface="+mn-ea"/>
+          <a:cs typeface="+mn-cs"/>
+        </a:defRPr>
+      </a:lvl9pPr>
+    </p:bodyStyle>
+    <p:otherStyle>
+      <a:defPPr>
+        <a:defRPr lang="en-US"/>
+      </a:defPPr>
+      <a:lvl1pPr marL="0" algn="l" defTabSz="914400" rtl="0" eaLnBrk="1" latinLnBrk="0" hangingPunct="1">
+        <a:defRPr sz="1800" kern="1200">
+          <a:solidFill>
+            <a:schemeClr val="tx1"/>
+          </a:solidFill>
+          <a:latin typeface="+mn-lt"/>
+          <a:ea typeface="+mn-ea"/>
+          <a:cs typeface="+mn-cs"/>
+        </a:defRPr>
+      </a:lvl1pPr>
+      <a:lvl2pPr marL="457200" algn="l" defTabSz="914400" rtl="0" eaLnBrk="1" latinLnBrk="0" hangingPunct="1">
+        <a:defRPr sz="1800" kern="1200">
+          <a:solidFill>
+            <a:schemeClr val="tx1"/>
+          </a:solidFill>
+          <a:latin typeface="+mn-lt"/>
+          <a:ea typeface="+mn-ea"/>
+          <a:cs typeface="+mn-cs"/>
+        </a:defRPr>
+      </a:lvl2pPr>
+      <a:lvl3pPr marL="914400" algn="l" defTabSz="914400" rtl="0" eaLnBrk="1" latinLnBrk="0" hangingPunct="1">
+        <a:defRPr sz="1800" kern="1200">
+          <a:solidFill>
+            <a:schemeClr val="tx1"/>
+          </a:solidFill>
+          <a:latin typeface="+mn-lt"/>
+          <a:ea typeface="+mn-ea"/>
+          <a:cs typeface="+mn-cs"/>
+        </a:defRPr>
+      </a:lvl3pPr>
+      <a:lvl4pPr marL="1371600" algn="l" defTabSz="914400" rtl="0" eaLnBrk="1" latinLnBrk="0" hangingPunct="1">
+        <a:defRPr sz="1800" kern="1200">
+          <a:solidFill>
+            <a:schemeClr val="tx1"/>
+          </a:solidFill>
+          <a:latin typeface="+mn-lt"/>
+          <a:ea typeface="+mn-ea"/>
+          <a:cs typeface="+mn-cs"/>
+        </a:defRPr>
+      </a:lvl4pPr>
+      <a:lvl5pPr marL="1828800" algn="l" defTabSz="914400" rtl="0" eaLnBrk="1" latinLnBrk="0" hangingPunct="1">
+        <a:defRPr sz="1800" kern="1200">
+          <a:solidFill>
+            <a:schemeClr val="tx1"/>
+          </a:solidFill>
+          <a:latin typeface="+mn-lt"/>
+          <a:ea typeface="+mn-ea"/>
+          <a:cs typeface="+mn-cs"/>
+        </a:defRPr>
+      </a:lvl5pPr>
+      <a:lvl6pPr marL="2286000" algn="l" defTabSz="914400" rtl="0" eaLnBrk="1" latinLnBrk="0" hangingPunct="1">
+        <a:defRPr sz="1800" kern="1200">
+          <a:solidFill>
+            <a:schemeClr val="tx1"/>
+          </a:solidFill>
+          <a:latin typeface="+mn-lt"/>
+          <a:ea typeface="+mn-ea"/>
+          <a:cs typeface="+mn-cs"/>
+        </a:defRPr>
+      </a:lvl6pPr>
+      <a:lvl7pPr marL="2743200" algn="l" defTabSz="914400" rtl="0" eaLnBrk="1" latinLnBrk="0" hangingPunct="1">
+        <a:defRPr sz="1800" kern="1200">
+          <a:solidFill>
+            <a:schemeClr val="tx1"/>
+          </a:solidFill>
+          <a:latin typeface="+mn-lt"/>
+          <a:ea typeface="+mn-ea"/>
+          <a:cs typeface="+mn-cs"/>
+        </a:defRPr>
+      </a:lvl7pPr>
+      <a:lvl8pPr marL="3200400" algn="l" defTabSz="914400" rtl="0" eaLnBrk="1" latinLnBrk="0" hangingPunct="1">
+        <a:defRPr sz="1800" kern="1200">
+          <a:solidFill>
+            <a:schemeClr val="tx1"/>
+          </a:solidFill>
+          <a:latin typeface="+mn-lt"/>
+          <a:ea typeface="+mn-ea"/>
+          <a:cs typeface="+mn-cs"/>
+        </a:defRPr>
+      </a:lvl8pPr>
+      <a:lvl9pPr marL="3657600" algn="l" defTabSz="914400" rtl="0" eaLnBrk="1" latinLnBrk="0" hangingPunct="1">
+        <a:defRPr sz="1800" kern="1200">
+          <a:solidFill>
+            <a:schemeClr val="tx1"/>
+          </a:solidFill>
+          <a:latin typeface="+mn-lt"/>
+          <a:ea typeface="+mn-ea"/>
+          <a:cs typeface="+mn-cs"/>
+        </a:defRPr>
+      </a:lvl9pPr>
+    </p:otherStyle>
+  </p:txStyles>
 </p:sldMaster>
 </file>
 
 <file path=ppt/slides/slide1.xml><?xml version="1.0" encoding="utf-8"?>
-<p:sld xmlns:a="http://schemas.openxmlformats.org/drawingml/2006/main" xmlns:p="http://schemas.openxmlformats.org/presentationml/2006/main" xmlns:r="http://schemas.openxmlformats.org/officeDocument/2006/relationships" xmlns:p14="http://schemas.microsoft.com/office/powerpoint/2010/main" xmlns:p15="http://schemas.microsoft.com/office/powerpoint/2012/main" xmlns:mc="http://schemas.openxmlformats.org/markup-compatibility/2006">
+<p:sld xmlns:a="http://schemas.openxmlformats.org/drawingml/2006/main" xmlns:r="http://schemas.openxmlformats.org/officeDocument/2006/relationships" xmlns:p="http://schemas.openxmlformats.org/presentationml/2006/main">
   <p:cSld>
     <p:spTree>
       <p:nvGrpSpPr>
@@ -1062,8 +1648,8 @@
         </p:nvSpPr>
         <p:spPr>
           <a:xfrm>
-            <a:off x="504000" y="226080"/>
-            <a:ext cx="9071640" cy="946440"/>
+            <a:off x="504000" y="394601"/>
+            <a:ext cx="9071640" cy="609398"/>
           </a:xfrm>
           <a:prstGeom prst="rect">
             <a:avLst/>
@@ -1077,12 +1663,13 @@
           <a:bodyPr lIns="0" tIns="0" rIns="0" bIns="0" anchor="ctr">
             <a:spAutoFit/>
           </a:bodyPr>
+          <a:lstStyle/>
           <a:p>
             <a:pPr indent="0" algn="ctr">
               <a:buNone/>
             </a:pPr>
             <a:r>
-              <a:rPr lang="en-US" sz="4400" b="0" u="none" strike="noStrike">
+              <a:rPr lang="en-US" sz="4400" b="0" u="none" strike="noStrike" dirty="0">
                 <a:solidFill>
                   <a:srgbClr val="000000"/>
                 </a:solidFill>
@@ -1090,16 +1677,8 @@
                 <a:uFillTx/>
                 <a:latin typeface="Arial"/>
               </a:rPr>
-              <a:t>Presentation: Name goes here</a:t>
-            </a:r>
-            <a:endParaRPr lang="en-US" sz="4400" b="0" u="none" strike="noStrike">
-              <a:solidFill>
-                <a:srgbClr val="000000"/>
-              </a:solidFill>
-              <a:effectLst/>
-              <a:uFillTx/>
-              <a:latin typeface="Arial"/>
-            </a:endParaRPr>
+              <a:t>Calculating Trade in Value</a:t>
+            </a:r>
           </a:p>
         </p:txBody>
       </p:sp>
@@ -1130,6 +1709,7 @@
           <a:bodyPr lIns="0" tIns="0" rIns="0" bIns="0" anchor="ctr">
             <a:spAutoFit/>
           </a:bodyPr>
+          <a:lstStyle/>
           <a:p>
             <a:pPr indent="0" algn="ctr">
               <a:buNone/>
@@ -1145,14 +1725,6 @@
               </a:rPr>
               <a:t>By: Stacy Bowler &amp;</a:t>
             </a:r>
-            <a:endParaRPr lang="en-US" sz="3200" b="0" u="none" strike="noStrike">
-              <a:solidFill>
-                <a:srgbClr val="000000"/>
-              </a:solidFill>
-              <a:effectLst/>
-              <a:uFillTx/>
-              <a:latin typeface="Arial"/>
-            </a:endParaRPr>
           </a:p>
           <a:p>
             <a:pPr indent="0" algn="ctr">
@@ -1169,32 +1741,19 @@
               </a:rPr>
               <a:t>Derrik Miller</a:t>
             </a:r>
-            <a:endParaRPr lang="en-US" sz="3200" b="0" u="none" strike="noStrike">
-              <a:solidFill>
-                <a:srgbClr val="000000"/>
-              </a:solidFill>
-              <a:effectLst/>
-              <a:uFillTx/>
-              <a:latin typeface="Arial"/>
-            </a:endParaRPr>
           </a:p>
         </p:txBody>
       </p:sp>
     </p:spTree>
   </p:cSld>
-  <mc:AlternateContent>
-    <mc:Choice Requires="p14">
-      <p:transition spd="slow" p14:dur="2000"/>
-    </mc:Choice>
-    <mc:Fallback>
-      <p:transition spd="slow"/>
-    </mc:Fallback>
-  </mc:AlternateContent>
+  <p:clrMapOvr>
+    <a:masterClrMapping/>
+  </p:clrMapOvr>
 </p:sld>
 </file>
 
-<file path=ppt/slides/slide2.xml><?xml version="1.0" encoding="utf-8"?>
-<p:sld xmlns:a="http://schemas.openxmlformats.org/drawingml/2006/main" xmlns:p="http://schemas.openxmlformats.org/presentationml/2006/main" xmlns:r="http://schemas.openxmlformats.org/officeDocument/2006/relationships" xmlns:p14="http://schemas.microsoft.com/office/powerpoint/2010/main" xmlns:p15="http://schemas.microsoft.com/office/powerpoint/2012/main" xmlns:mc="http://schemas.openxmlformats.org/markup-compatibility/2006">
+<file path=ppt/slides/slide10.xml><?xml version="1.0" encoding="utf-8"?>
+<p:sld xmlns:a="http://schemas.openxmlformats.org/drawingml/2006/main" xmlns:r="http://schemas.openxmlformats.org/officeDocument/2006/relationships" xmlns:p="http://schemas.openxmlformats.org/presentationml/2006/main">
   <p:cSld>
     <p:spTree>
       <p:nvGrpSpPr>
@@ -1212,7 +1771,13 @@
       </p:grpSpPr>
       <p:sp>
         <p:nvSpPr>
-          <p:cNvPr id="13" name="PlaceHolder 1"/>
+          <p:cNvPr id="2" name="Title 1">
+            <a:extLst>
+              <a:ext uri="{FF2B5EF4-FFF2-40B4-BE49-F238E27FC236}">
+                <a16:creationId xmlns:a16="http://schemas.microsoft.com/office/drawing/2014/main" id="{1B446956-4994-0E58-6059-98C7E9C12F9E}"/>
+              </a:ext>
+            </a:extLst>
+          </p:cNvPr>
           <p:cNvSpPr>
             <a:spLocks noGrp="1"/>
           </p:cNvSpPr>
@@ -1222,161 +1787,66 @@
         </p:nvSpPr>
         <p:spPr>
           <a:xfrm>
-            <a:off x="504000" y="226080"/>
-            <a:ext cx="9071640" cy="946440"/>
+            <a:off x="504000" y="394601"/>
+            <a:ext cx="9071640" cy="609398"/>
+          </a:xfrm>
+        </p:spPr>
+        <p:txBody>
+          <a:bodyPr/>
+          <a:lstStyle/>
+          <a:p>
+            <a:r>
+              <a:rPr lang="en-US" dirty="0"/>
+              <a:t>Model Predictors</a:t>
+            </a:r>
+          </a:p>
+        </p:txBody>
+      </p:sp>
+      <p:pic>
+        <p:nvPicPr>
+          <p:cNvPr id="5" name="Picture 4">
+            <a:extLst>
+              <a:ext uri="{FF2B5EF4-FFF2-40B4-BE49-F238E27FC236}">
+                <a16:creationId xmlns:a16="http://schemas.microsoft.com/office/drawing/2014/main" id="{56C72709-EB0D-6591-7FA3-050F220B6B7B}"/>
+              </a:ext>
+            </a:extLst>
+          </p:cNvPr>
+          <p:cNvPicPr>
+            <a:picLocks noChangeAspect="1"/>
+          </p:cNvPicPr>
+          <p:nvPr/>
+        </p:nvPicPr>
+        <p:blipFill>
+          <a:blip r:embed="rId2"/>
+          <a:stretch>
+            <a:fillRect/>
+          </a:stretch>
+        </p:blipFill>
+        <p:spPr>
+          <a:xfrm>
+            <a:off x="771727" y="930612"/>
+            <a:ext cx="8903579" cy="4963575"/>
           </a:xfrm>
           <a:prstGeom prst="rect">
             <a:avLst/>
           </a:prstGeom>
-          <a:noFill/>
-          <a:ln w="0">
-            <a:noFill/>
-          </a:ln>
         </p:spPr>
-        <p:txBody>
-          <a:bodyPr lIns="0" tIns="0" rIns="0" bIns="0" anchor="ctr">
-            <a:spAutoFit/>
-          </a:bodyPr>
-          <a:p>
-            <a:pPr indent="0" algn="ctr">
-              <a:buNone/>
-            </a:pPr>
-            <a:r>
-              <a:rPr lang="en-US" sz="4400" b="0" u="none" strike="noStrike">
-                <a:solidFill>
-                  <a:srgbClr val="000000"/>
-                </a:solidFill>
-                <a:effectLst/>
-                <a:uFillTx/>
-                <a:latin typeface="Arial"/>
-              </a:rPr>
-              <a:t>Explain the Business Problem</a:t>
-            </a:r>
-            <a:endParaRPr lang="en-US" sz="4400" b="0" u="none" strike="noStrike">
-              <a:solidFill>
-                <a:srgbClr val="000000"/>
-              </a:solidFill>
-              <a:effectLst/>
-              <a:uFillTx/>
-              <a:latin typeface="Arial"/>
-            </a:endParaRPr>
-          </a:p>
-        </p:txBody>
-      </p:sp>
-      <p:sp>
-        <p:nvSpPr>
-          <p:cNvPr id="14" name="PlaceHolder 2"/>
-          <p:cNvSpPr>
-            <a:spLocks noGrp="1"/>
-          </p:cNvSpPr>
-          <p:nvPr>
-            <p:ph/>
-          </p:nvPr>
-        </p:nvSpPr>
-        <p:spPr>
-          <a:xfrm>
-            <a:off x="457200" y="1371600"/>
-            <a:ext cx="9071640" cy="3288240"/>
-          </a:xfrm>
-          <a:prstGeom prst="rect">
-            <a:avLst/>
-          </a:prstGeom>
-          <a:noFill/>
-          <a:ln w="0">
-            <a:noFill/>
-          </a:ln>
-        </p:spPr>
-        <p:txBody>
-          <a:bodyPr lIns="0" tIns="0" rIns="0" bIns="0" anchor="t">
-            <a:normAutofit fontScale="92500" lnSpcReduction="9999"/>
-          </a:bodyPr>
-          <a:p>
-            <a:pPr marL="432000" indent="-324000" algn="l">
-              <a:spcBef>
-                <a:spcPts val="1191"/>
-              </a:spcBef>
-              <a:spcAft>
-                <a:spcPts val="992"/>
-              </a:spcAft>
-              <a:buClr>
-                <a:srgbClr val="000000"/>
-              </a:buClr>
-              <a:buSzPct val="45000"/>
-              <a:buFont typeface="Wingdings" charset="2"/>
-              <a:buChar char=""/>
-            </a:pPr>
-            <a:r>
-              <a:rPr lang="en-US" sz="3200" b="0" u="none" strike="noStrike">
-                <a:solidFill>
-                  <a:srgbClr val="000000"/>
-                </a:solidFill>
-                <a:effectLst/>
-                <a:uFillTx/>
-                <a:latin typeface="Arial"/>
-              </a:rPr>
-              <a:t>You have selected data that will help inform a business decision. You need to clearly explain the business problem and how the data you have selected will inform the business decision.</a:t>
-            </a:r>
-            <a:endParaRPr lang="en-US" sz="3200" b="0" u="none" strike="noStrike">
-              <a:solidFill>
-                <a:srgbClr val="000000"/>
-              </a:solidFill>
-              <a:effectLst/>
-              <a:uFillTx/>
-              <a:latin typeface="Arial"/>
-            </a:endParaRPr>
-          </a:p>
-          <a:p>
-            <a:pPr marL="432000" indent="-324000" algn="l">
-              <a:spcBef>
-                <a:spcPts val="1191"/>
-              </a:spcBef>
-              <a:spcAft>
-                <a:spcPts val="992"/>
-              </a:spcAft>
-              <a:buClr>
-                <a:srgbClr val="000000"/>
-              </a:buClr>
-              <a:buSzPct val="45000"/>
-              <a:buFont typeface="Wingdings" charset="2"/>
-              <a:buChar char=""/>
-            </a:pPr>
-            <a:r>
-              <a:rPr lang="en-US" sz="3200" b="0" u="none" strike="noStrike">
-                <a:solidFill>
-                  <a:srgbClr val="000000"/>
-                </a:solidFill>
-                <a:effectLst/>
-                <a:uFillTx/>
-                <a:latin typeface="Arial"/>
-              </a:rPr>
-              <a:t>This might seem strange to do if you're talking to the decision maker, but being transparent about what you understand the problem is will give them confidence that you're on the same page.</a:t>
-            </a:r>
-            <a:endParaRPr lang="en-US" sz="3200" b="0" u="none" strike="noStrike">
-              <a:solidFill>
-                <a:srgbClr val="000000"/>
-              </a:solidFill>
-              <a:effectLst/>
-              <a:uFillTx/>
-              <a:latin typeface="Arial"/>
-            </a:endParaRPr>
-          </a:p>
-        </p:txBody>
-      </p:sp>
+      </p:pic>
     </p:spTree>
+    <p:extLst>
+      <p:ext uri="{BB962C8B-B14F-4D97-AF65-F5344CB8AC3E}">
+        <p14:creationId xmlns:p14="http://schemas.microsoft.com/office/powerpoint/2010/main" val="3768427284"/>
+      </p:ext>
+    </p:extLst>
   </p:cSld>
-  <mc:AlternateContent>
-    <mc:Choice Requires="p14">
-      <p:transition spd="slow" p14:dur="2000"/>
-    </mc:Choice>
-    <mc:Fallback>
-      <p:transition spd="slow"/>
-    </mc:Fallback>
-  </mc:AlternateContent>
+  <p:clrMapOvr>
+    <a:masterClrMapping/>
+  </p:clrMapOvr>
 </p:sld>
 </file>
 
-<file path=ppt/slides/slide3.xml><?xml version="1.0" encoding="utf-8"?>
-<p:sld xmlns:a="http://schemas.openxmlformats.org/drawingml/2006/main" xmlns:p="http://schemas.openxmlformats.org/presentationml/2006/main" xmlns:r="http://schemas.openxmlformats.org/officeDocument/2006/relationships" xmlns:p14="http://schemas.microsoft.com/office/powerpoint/2010/main" xmlns:p15="http://schemas.microsoft.com/office/powerpoint/2012/main" xmlns:mc="http://schemas.openxmlformats.org/markup-compatibility/2006">
+<file path=ppt/slides/slide11.xml><?xml version="1.0" encoding="utf-8"?>
+<p:sld xmlns:a="http://schemas.openxmlformats.org/drawingml/2006/main" xmlns:r="http://schemas.openxmlformats.org/officeDocument/2006/relationships" xmlns:p="http://schemas.openxmlformats.org/presentationml/2006/main">
   <p:cSld>
     <p:spTree>
       <p:nvGrpSpPr>
@@ -1394,7 +1864,13 @@
       </p:grpSpPr>
       <p:sp>
         <p:nvSpPr>
-          <p:cNvPr id="15" name="PlaceHolder 1"/>
+          <p:cNvPr id="2" name="Title 1">
+            <a:extLst>
+              <a:ext uri="{FF2B5EF4-FFF2-40B4-BE49-F238E27FC236}">
+                <a16:creationId xmlns:a16="http://schemas.microsoft.com/office/drawing/2014/main" id="{BCDB1418-DEB5-092B-5E26-EF74ADD07DA5}"/>
+              </a:ext>
+            </a:extLst>
+          </p:cNvPr>
           <p:cNvSpPr>
             <a:spLocks noGrp="1"/>
           </p:cNvSpPr>
@@ -1404,161 +1880,87 @@
         </p:nvSpPr>
         <p:spPr>
           <a:xfrm>
-            <a:off x="504000" y="226080"/>
-            <a:ext cx="9071640" cy="946440"/>
+            <a:off x="504000" y="394601"/>
+            <a:ext cx="9071640" cy="609398"/>
           </a:xfrm>
-          <a:prstGeom prst="rect">
-            <a:avLst/>
-          </a:prstGeom>
-          <a:noFill/>
-          <a:ln w="0">
-            <a:noFill/>
-          </a:ln>
         </p:spPr>
         <p:txBody>
-          <a:bodyPr lIns="0" tIns="0" rIns="0" bIns="0" anchor="ctr">
-            <a:spAutoFit/>
-          </a:bodyPr>
-          <a:p>
-            <a:pPr indent="0" algn="ctr">
-              <a:buNone/>
-            </a:pPr>
-            <a:r>
-              <a:rPr lang="en-US" sz="4400" b="0" u="none" strike="noStrike">
-                <a:solidFill>
-                  <a:srgbClr val="000000"/>
-                </a:solidFill>
-                <a:effectLst/>
-                <a:uFillTx/>
-                <a:latin typeface="Arial"/>
-              </a:rPr>
-              <a:t>Provide an Executive Summary</a:t>
-            </a:r>
-            <a:endParaRPr lang="en-US" sz="4400" b="0" u="none" strike="noStrike">
-              <a:solidFill>
-                <a:srgbClr val="000000"/>
-              </a:solidFill>
-              <a:effectLst/>
-              <a:uFillTx/>
-              <a:latin typeface="Arial"/>
-            </a:endParaRPr>
-          </a:p>
-        </p:txBody>
-      </p:sp>
-      <p:sp>
-        <p:nvSpPr>
-          <p:cNvPr id="16" name="PlaceHolder 2"/>
-          <p:cNvSpPr>
-            <a:spLocks noGrp="1"/>
-          </p:cNvSpPr>
-          <p:nvPr>
-            <p:ph/>
+          <a:bodyPr/>
+          <a:lstStyle/>
+          <a:p>
+            <a:r>
+              <a:rPr lang="en-US" dirty="0"/>
+              <a:t>Conclusion</a:t>
+            </a:r>
+          </a:p>
+        </p:txBody>
+      </p:sp>
+      <p:sp>
+        <p:nvSpPr>
+          <p:cNvPr id="3" name="Subtitle 2">
+            <a:extLst>
+              <a:ext uri="{FF2B5EF4-FFF2-40B4-BE49-F238E27FC236}">
+                <a16:creationId xmlns:a16="http://schemas.microsoft.com/office/drawing/2014/main" id="{B6A334C2-181E-EB77-C9BB-80A3EAD858BE}"/>
+              </a:ext>
+            </a:extLst>
+          </p:cNvPr>
+          <p:cNvSpPr>
+            <a:spLocks noGrp="1"/>
+          </p:cNvSpPr>
+          <p:nvPr>
+            <p:ph type="subTitle"/>
           </p:nvPr>
         </p:nvSpPr>
         <p:spPr>
           <a:xfrm>
-            <a:off x="504000" y="1326600"/>
-            <a:ext cx="9071640" cy="3288240"/>
+            <a:off x="504000" y="2008919"/>
+            <a:ext cx="9071640" cy="1923604"/>
           </a:xfrm>
-          <a:prstGeom prst="rect">
-            <a:avLst/>
-          </a:prstGeom>
-          <a:noFill/>
-          <a:ln w="0">
-            <a:noFill/>
-          </a:ln>
         </p:spPr>
         <p:txBody>
-          <a:bodyPr lIns="0" tIns="0" rIns="0" bIns="0" anchor="t">
-            <a:normAutofit fontScale="92500" lnSpcReduction="9999"/>
-          </a:bodyPr>
-          <a:p>
-            <a:pPr marL="432000" indent="-324000" algn="l">
-              <a:spcBef>
-                <a:spcPts val="1191"/>
-              </a:spcBef>
-              <a:spcAft>
-                <a:spcPts val="992"/>
-              </a:spcAft>
-              <a:buClr>
-                <a:srgbClr val="000000"/>
-              </a:buClr>
-              <a:buSzPct val="45000"/>
-              <a:buFont typeface="Wingdings" charset="2"/>
-              <a:buChar char=""/>
-            </a:pPr>
-            <a:r>
-              <a:rPr lang="en-US" sz="3200" b="0" u="none" strike="noStrike">
-                <a:solidFill>
-                  <a:srgbClr val="000000"/>
-                </a:solidFill>
-                <a:effectLst/>
-                <a:uFillTx/>
-                <a:latin typeface="Arial"/>
-              </a:rPr>
-              <a:t>Once the context of the business decision is understood, you need to summarize the model results in a way that is technically correct while being accessible.</a:t>
-            </a:r>
-            <a:endParaRPr lang="en-US" sz="3200" b="0" u="none" strike="noStrike">
-              <a:solidFill>
-                <a:srgbClr val="000000"/>
-              </a:solidFill>
-              <a:effectLst/>
-              <a:uFillTx/>
-              <a:latin typeface="Arial"/>
-            </a:endParaRPr>
-          </a:p>
-          <a:p>
-            <a:pPr marL="432000" indent="-324000" algn="l">
-              <a:spcBef>
-                <a:spcPts val="1191"/>
-              </a:spcBef>
-              <a:spcAft>
-                <a:spcPts val="992"/>
-              </a:spcAft>
-              <a:buClr>
-                <a:srgbClr val="000000"/>
-              </a:buClr>
-              <a:buSzPct val="45000"/>
-              <a:buFont typeface="Wingdings" charset="2"/>
-              <a:buChar char=""/>
-            </a:pPr>
-            <a:r>
-              <a:rPr lang="en-US" sz="3200" b="0" u="none" strike="noStrike">
-                <a:solidFill>
-                  <a:srgbClr val="000000"/>
-                </a:solidFill>
-                <a:effectLst/>
-                <a:uFillTx/>
-                <a:latin typeface="Arial"/>
-              </a:rPr>
-              <a:t>This executive summary should be as short and simple as possible. Don't make your audience wait for the answer: make it clear from the beginning. The rest of the presentation is details.</a:t>
-            </a:r>
-            <a:endParaRPr lang="en-US" sz="3200" b="0" u="none" strike="noStrike">
-              <a:solidFill>
-                <a:srgbClr val="000000"/>
-              </a:solidFill>
-              <a:effectLst/>
-              <a:uFillTx/>
-              <a:latin typeface="Arial"/>
-            </a:endParaRPr>
+          <a:bodyPr/>
+          <a:lstStyle/>
+          <a:p>
+            <a:r>
+              <a:rPr lang="en-US" sz="2000" dirty="0"/>
+              <a:t>Odometer has minimal or no impact on price</a:t>
+            </a:r>
+          </a:p>
+          <a:p>
+            <a:r>
+              <a:rPr lang="en-US" sz="2000" dirty="0"/>
+              <a:t>Vehicle age has largest impact on price between it, odometer, and condition</a:t>
+            </a:r>
+          </a:p>
+          <a:p>
+            <a:r>
+              <a:rPr lang="en-US" sz="2000" dirty="0"/>
+              <a:t>Models (inherently include make and body) can have largest impact. Possibly due to original higher/lower than average new price</a:t>
+            </a:r>
+          </a:p>
+          <a:p>
+            <a:r>
+              <a:rPr lang="en-US" sz="2000" dirty="0"/>
+              <a:t>Most valuable vehicles are almost all trucks</a:t>
+            </a:r>
           </a:p>
         </p:txBody>
       </p:sp>
     </p:spTree>
+    <p:extLst>
+      <p:ext uri="{BB962C8B-B14F-4D97-AF65-F5344CB8AC3E}">
+        <p14:creationId xmlns:p14="http://schemas.microsoft.com/office/powerpoint/2010/main" val="3490596762"/>
+      </p:ext>
+    </p:extLst>
   </p:cSld>
-  <mc:AlternateContent>
-    <mc:Choice Requires="p14">
-      <p:transition spd="slow" p14:dur="2000"/>
-    </mc:Choice>
-    <mc:Fallback>
-      <p:transition spd="slow"/>
-    </mc:Fallback>
-  </mc:AlternateContent>
+  <p:clrMapOvr>
+    <a:masterClrMapping/>
+  </p:clrMapOvr>
 </p:sld>
 </file>
 
-<file path=ppt/slides/slide4.xml><?xml version="1.0" encoding="utf-8"?>
-<p:sld xmlns:a="http://schemas.openxmlformats.org/drawingml/2006/main" xmlns:p="http://schemas.openxmlformats.org/presentationml/2006/main" xmlns:r="http://schemas.openxmlformats.org/officeDocument/2006/relationships" xmlns:p14="http://schemas.microsoft.com/office/powerpoint/2010/main" xmlns:p15="http://schemas.microsoft.com/office/powerpoint/2012/main" xmlns:mc="http://schemas.openxmlformats.org/markup-compatibility/2006">
+<file path=ppt/slides/slide12.xml><?xml version="1.0" encoding="utf-8"?>
+<p:sld xmlns:a="http://schemas.openxmlformats.org/drawingml/2006/main" xmlns:r="http://schemas.openxmlformats.org/officeDocument/2006/relationships" xmlns:p="http://schemas.openxmlformats.org/presentationml/2006/main">
   <p:cSld>
     <p:spTree>
       <p:nvGrpSpPr>
@@ -1576,7 +1978,7 @@
       </p:grpSpPr>
       <p:sp>
         <p:nvSpPr>
-          <p:cNvPr id="17" name="PlaceHolder 1"/>
+          <p:cNvPr id="19" name="PlaceHolder 1"/>
           <p:cNvSpPr>
             <a:spLocks noGrp="1"/>
           </p:cNvSpPr>
@@ -1586,8 +1988,8 @@
         </p:nvSpPr>
         <p:spPr>
           <a:xfrm>
-            <a:off x="504000" y="226080"/>
-            <a:ext cx="9071640" cy="946440"/>
+            <a:off x="504000" y="394601"/>
+            <a:ext cx="9071640" cy="609398"/>
           </a:xfrm>
           <a:prstGeom prst="rect">
             <a:avLst/>
@@ -1601,12 +2003,13 @@
           <a:bodyPr lIns="0" tIns="0" rIns="0" bIns="0" anchor="ctr">
             <a:spAutoFit/>
           </a:bodyPr>
+          <a:lstStyle/>
           <a:p>
             <a:pPr indent="0" algn="ctr">
               <a:buNone/>
             </a:pPr>
             <a:r>
-              <a:rPr lang="en-US" sz="4400" b="0" u="none" strike="noStrike">
+              <a:rPr lang="en-US" sz="4400" b="0" u="none" strike="noStrike" dirty="0">
                 <a:solidFill>
                   <a:srgbClr val="000000"/>
                 </a:solidFill>
@@ -1614,133 +2017,21 @@
                 <a:uFillTx/>
                 <a:latin typeface="Arial"/>
               </a:rPr>
-              <a:t>Summarizing the Data</a:t>
-            </a:r>
-            <a:endParaRPr lang="en-US" sz="4400" b="0" u="none" strike="noStrike">
-              <a:solidFill>
-                <a:srgbClr val="000000"/>
-              </a:solidFill>
-              <a:effectLst/>
-              <a:uFillTx/>
-              <a:latin typeface="Arial"/>
-            </a:endParaRPr>
-          </a:p>
-        </p:txBody>
-      </p:sp>
-      <p:sp>
-        <p:nvSpPr>
-          <p:cNvPr id="18" name="PlaceHolder 2"/>
-          <p:cNvSpPr>
-            <a:spLocks noGrp="1"/>
-          </p:cNvSpPr>
-          <p:nvPr>
-            <p:ph/>
-          </p:nvPr>
-        </p:nvSpPr>
-        <p:spPr>
-          <a:xfrm>
-            <a:off x="504000" y="1326600"/>
-            <a:ext cx="9071640" cy="3288240"/>
-          </a:xfrm>
-          <a:prstGeom prst="rect">
-            <a:avLst/>
-          </a:prstGeom>
-          <a:noFill/>
-          <a:ln w="0">
-            <a:noFill/>
-          </a:ln>
-        </p:spPr>
-        <p:txBody>
-          <a:bodyPr lIns="0" tIns="0" rIns="0" bIns="0" anchor="t">
-            <a:normAutofit/>
-          </a:bodyPr>
-          <a:p>
-            <a:pPr marL="432000" indent="-324000" algn="l">
-              <a:spcBef>
-                <a:spcPts val="1191"/>
-              </a:spcBef>
-              <a:spcAft>
-                <a:spcPts val="992"/>
-              </a:spcAft>
-              <a:buClr>
-                <a:srgbClr val="000000"/>
-              </a:buClr>
-              <a:buSzPct val="45000"/>
-              <a:buFont typeface="Wingdings" charset="2"/>
-              <a:buChar char=""/>
-            </a:pPr>
-            <a:r>
-              <a:rPr lang="en-US" sz="3200" b="0" u="none" strike="noStrike">
-                <a:solidFill>
-                  <a:srgbClr val="000000"/>
-                </a:solidFill>
-                <a:effectLst/>
-                <a:uFillTx/>
-                <a:latin typeface="Arial"/>
-              </a:rPr>
-              <a:t>Showcase the essentials from your exploratory data analysis so that your audience understands the data.</a:t>
-            </a:r>
-            <a:endParaRPr lang="en-US" sz="3200" b="0" u="none" strike="noStrike">
-              <a:solidFill>
-                <a:srgbClr val="000000"/>
-              </a:solidFill>
-              <a:effectLst/>
-              <a:uFillTx/>
-              <a:latin typeface="Arial"/>
-            </a:endParaRPr>
-          </a:p>
-          <a:p>
-            <a:pPr marL="432000" indent="-324000" algn="l">
-              <a:spcBef>
-                <a:spcPts val="1191"/>
-              </a:spcBef>
-              <a:spcAft>
-                <a:spcPts val="992"/>
-              </a:spcAft>
-              <a:buClr>
-                <a:srgbClr val="000000"/>
-              </a:buClr>
-              <a:buSzPct val="45000"/>
-              <a:buFont typeface="Wingdings" charset="2"/>
-              <a:buChar char=""/>
-            </a:pPr>
-            <a:r>
-              <a:rPr lang="en-US" sz="3200" b="0" u="none" strike="noStrike">
-                <a:solidFill>
-                  <a:srgbClr val="000000"/>
-                </a:solidFill>
-                <a:effectLst/>
-                <a:uFillTx/>
-                <a:latin typeface="Arial"/>
-              </a:rPr>
-              <a:t>Visualizations should be heavily featured. Make sure they are clearly labeled.</a:t>
-            </a:r>
-            <a:endParaRPr lang="en-US" sz="3200" b="0" u="none" strike="noStrike">
-              <a:solidFill>
-                <a:srgbClr val="000000"/>
-              </a:solidFill>
-              <a:effectLst/>
-              <a:uFillTx/>
-              <a:latin typeface="Arial"/>
-            </a:endParaRPr>
+              <a:t>Questions?</a:t>
+            </a:r>
           </a:p>
         </p:txBody>
       </p:sp>
     </p:spTree>
   </p:cSld>
-  <mc:AlternateContent>
-    <mc:Choice Requires="p14">
-      <p:transition spd="slow" p14:dur="2000"/>
-    </mc:Choice>
-    <mc:Fallback>
-      <p:transition spd="slow"/>
-    </mc:Fallback>
-  </mc:AlternateContent>
+  <p:clrMapOvr>
+    <a:masterClrMapping/>
+  </p:clrMapOvr>
 </p:sld>
 </file>
 
-<file path=ppt/slides/slide5.xml><?xml version="1.0" encoding="utf-8"?>
-<p:sld xmlns:a="http://schemas.openxmlformats.org/drawingml/2006/main" xmlns:p="http://schemas.openxmlformats.org/presentationml/2006/main" xmlns:r="http://schemas.openxmlformats.org/officeDocument/2006/relationships" xmlns:p14="http://schemas.microsoft.com/office/powerpoint/2010/main" xmlns:p15="http://schemas.microsoft.com/office/powerpoint/2012/main" xmlns:mc="http://schemas.openxmlformats.org/markup-compatibility/2006">
+<file path=ppt/slides/slide13.xml><?xml version="1.0" encoding="utf-8"?>
+<p:sld xmlns:a="http://schemas.openxmlformats.org/drawingml/2006/main" xmlns:r="http://schemas.openxmlformats.org/officeDocument/2006/relationships" xmlns:p="http://schemas.openxmlformats.org/presentationml/2006/main">
   <p:cSld>
     <p:spTree>
       <p:nvGrpSpPr>
@@ -1758,7 +2049,13 @@
       </p:grpSpPr>
       <p:sp>
         <p:nvSpPr>
-          <p:cNvPr id="19" name="PlaceHolder 1"/>
+          <p:cNvPr id="2" name="Title 1">
+            <a:extLst>
+              <a:ext uri="{FF2B5EF4-FFF2-40B4-BE49-F238E27FC236}">
+                <a16:creationId xmlns:a16="http://schemas.microsoft.com/office/drawing/2014/main" id="{3831FDA1-8699-6F97-6F6C-D3E0929CA452}"/>
+              </a:ext>
+            </a:extLst>
+          </p:cNvPr>
           <p:cNvSpPr>
             <a:spLocks noGrp="1"/>
           </p:cNvSpPr>
@@ -1768,196 +2065,36 @@
         </p:nvSpPr>
         <p:spPr>
           <a:xfrm>
-            <a:off x="504000" y="226080"/>
-            <a:ext cx="9071640" cy="946440"/>
+            <a:off x="504000" y="394601"/>
+            <a:ext cx="9071640" cy="609398"/>
           </a:xfrm>
-          <a:prstGeom prst="rect">
-            <a:avLst/>
-          </a:prstGeom>
-          <a:noFill/>
-          <a:ln w="0">
-            <a:noFill/>
-          </a:ln>
         </p:spPr>
         <p:txBody>
-          <a:bodyPr lIns="0" tIns="0" rIns="0" bIns="0" anchor="ctr">
-            <a:spAutoFit/>
-          </a:bodyPr>
-          <a:p>
-            <a:pPr indent="0" algn="ctr">
-              <a:buNone/>
-            </a:pPr>
-            <a:r>
-              <a:rPr lang="en-US" sz="4400" b="0" u="none" strike="noStrike">
-                <a:solidFill>
-                  <a:srgbClr val="000000"/>
-                </a:solidFill>
-                <a:effectLst/>
-                <a:uFillTx/>
-                <a:latin typeface="Arial"/>
-              </a:rPr>
-              <a:t>Detailing the Model</a:t>
-            </a:r>
-            <a:endParaRPr lang="en-US" sz="4400" b="0" u="none" strike="noStrike">
-              <a:solidFill>
-                <a:srgbClr val="000000"/>
-              </a:solidFill>
-              <a:effectLst/>
-              <a:uFillTx/>
-              <a:latin typeface="Arial"/>
-            </a:endParaRPr>
-          </a:p>
-        </p:txBody>
-      </p:sp>
-      <p:sp>
-        <p:nvSpPr>
-          <p:cNvPr id="20" name="PlaceHolder 2"/>
-          <p:cNvSpPr>
-            <a:spLocks noGrp="1"/>
-          </p:cNvSpPr>
-          <p:nvPr>
-            <p:ph/>
-          </p:nvPr>
-        </p:nvSpPr>
-        <p:spPr>
-          <a:xfrm>
-            <a:off x="504000" y="1326600"/>
-            <a:ext cx="9071640" cy="3288240"/>
-          </a:xfrm>
-          <a:prstGeom prst="rect">
-            <a:avLst/>
-          </a:prstGeom>
-          <a:noFill/>
-          <a:ln w="0">
-            <a:noFill/>
-          </a:ln>
-        </p:spPr>
-        <p:txBody>
-          <a:bodyPr lIns="0" tIns="0" rIns="0" bIns="0" anchor="t">
-            <a:normAutofit fontScale="85000" lnSpcReduction="19999"/>
-          </a:bodyPr>
-          <a:p>
-            <a:pPr marL="432000" indent="-324000" algn="l">
-              <a:spcBef>
-                <a:spcPts val="1191"/>
-              </a:spcBef>
-              <a:spcAft>
-                <a:spcPts val="992"/>
-              </a:spcAft>
-              <a:buClr>
-                <a:srgbClr val="000000"/>
-              </a:buClr>
-              <a:buSzPct val="45000"/>
-              <a:buFont typeface="Wingdings" charset="2"/>
-              <a:buChar char=""/>
-            </a:pPr>
-            <a:r>
-              <a:rPr lang="en-US" sz="2600" b="0" u="none" strike="noStrike">
-                <a:solidFill>
-                  <a:srgbClr val="000000"/>
-                </a:solidFill>
-                <a:effectLst/>
-                <a:uFillTx/>
-                <a:latin typeface="Arial"/>
-              </a:rPr>
-              <a:t>Now that your audience knows the answers and something about the data, show them how you got there.</a:t>
-            </a:r>
-            <a:endParaRPr lang="en-US" sz="2600" b="0" u="none" strike="noStrike">
-              <a:solidFill>
-                <a:srgbClr val="000000"/>
-              </a:solidFill>
-              <a:effectLst/>
-              <a:uFillTx/>
-              <a:latin typeface="Arial"/>
-            </a:endParaRPr>
-          </a:p>
-          <a:p>
-            <a:pPr marL="432000" indent="-324000" algn="l">
-              <a:spcBef>
-                <a:spcPts val="1191"/>
-              </a:spcBef>
-              <a:spcAft>
-                <a:spcPts val="992"/>
-              </a:spcAft>
-              <a:buClr>
-                <a:srgbClr val="000000"/>
-              </a:buClr>
-              <a:buSzPct val="45000"/>
-              <a:buFont typeface="Wingdings" charset="2"/>
-              <a:buChar char=""/>
-            </a:pPr>
-            <a:r>
-              <a:rPr lang="en-US" sz="2600" b="0" u="none" strike="noStrike">
-                <a:solidFill>
-                  <a:srgbClr val="000000"/>
-                </a:solidFill>
-                <a:effectLst/>
-                <a:uFillTx/>
-                <a:latin typeface="Arial"/>
-              </a:rPr>
-              <a:t>Explain the models you compared and which you selected as best and why, including variables included, validating assumptions, choices that you made along the way, and correct statistical inference to all back up the summary of the model results you've given. Don't share model output tables or show how all the model assumptions were met. Focus on visualizations and interpreting the parameter estimates in terms of the business application.</a:t>
-            </a:r>
-            <a:endParaRPr lang="en-US" sz="2600" b="0" u="none" strike="noStrike">
-              <a:solidFill>
-                <a:srgbClr val="000000"/>
-              </a:solidFill>
-              <a:effectLst/>
-              <a:uFillTx/>
-              <a:latin typeface="Arial"/>
-            </a:endParaRPr>
-          </a:p>
-          <a:p>
-            <a:pPr marL="432000" indent="-324000" algn="l">
-              <a:spcBef>
-                <a:spcPts val="1191"/>
-              </a:spcBef>
-              <a:spcAft>
-                <a:spcPts val="992"/>
-              </a:spcAft>
-              <a:buClr>
-                <a:srgbClr val="000000"/>
-              </a:buClr>
-              <a:buSzPct val="45000"/>
-              <a:buFont typeface="Wingdings" charset="2"/>
-              <a:buChar char=""/>
-            </a:pPr>
-            <a:r>
-              <a:rPr lang="en-US" sz="2600" b="0" u="none" strike="noStrike">
-                <a:solidFill>
-                  <a:srgbClr val="000000"/>
-                </a:solidFill>
-                <a:effectLst/>
-                <a:uFillTx/>
-                <a:latin typeface="Arial"/>
-              </a:rPr>
-              <a:t>Conclude with summarizing the model results again with the data and model results as context. Make your recommendations for the business problem clear.</a:t>
-            </a:r>
-            <a:endParaRPr lang="en-US" sz="2600" b="0" u="none" strike="noStrike">
-              <a:solidFill>
-                <a:srgbClr val="000000"/>
-              </a:solidFill>
-              <a:effectLst/>
-              <a:uFillTx/>
-              <a:latin typeface="Arial"/>
-            </a:endParaRPr>
+          <a:bodyPr/>
+          <a:lstStyle/>
+          <a:p>
+            <a:r>
+              <a:rPr lang="en-US" dirty="0"/>
+              <a:t>Appendix</a:t>
+            </a:r>
           </a:p>
         </p:txBody>
       </p:sp>
     </p:spTree>
+    <p:extLst>
+      <p:ext uri="{BB962C8B-B14F-4D97-AF65-F5344CB8AC3E}">
+        <p14:creationId xmlns:p14="http://schemas.microsoft.com/office/powerpoint/2010/main" val="338983547"/>
+      </p:ext>
+    </p:extLst>
   </p:cSld>
-  <mc:AlternateContent>
-    <mc:Choice Requires="p14">
-      <p:transition spd="slow" p14:dur="2000"/>
-    </mc:Choice>
-    <mc:Fallback>
-      <p:transition spd="slow"/>
-    </mc:Fallback>
-  </mc:AlternateContent>
+  <p:clrMapOvr>
+    <a:masterClrMapping/>
+  </p:clrMapOvr>
 </p:sld>
 </file>
 
-<file path=ppt/slides/slide6.xml><?xml version="1.0" encoding="utf-8"?>
-<p:sld xmlns:a="http://schemas.openxmlformats.org/drawingml/2006/main" xmlns:p="http://schemas.openxmlformats.org/presentationml/2006/main" xmlns:r="http://schemas.openxmlformats.org/officeDocument/2006/relationships" xmlns:p14="http://schemas.microsoft.com/office/powerpoint/2010/main" xmlns:p15="http://schemas.microsoft.com/office/powerpoint/2012/main" xmlns:mc="http://schemas.openxmlformats.org/markup-compatibility/2006">
+<file path=ppt/slides/slide14.xml><?xml version="1.0" encoding="utf-8"?>
+<p:sld xmlns:a="http://schemas.openxmlformats.org/drawingml/2006/main" xmlns:r="http://schemas.openxmlformats.org/officeDocument/2006/relationships" xmlns:p="http://schemas.openxmlformats.org/presentationml/2006/main">
   <p:cSld>
     <p:spTree>
       <p:nvGrpSpPr>
@@ -1975,7 +2112,376 @@
       </p:grpSpPr>
       <p:sp>
         <p:nvSpPr>
-          <p:cNvPr id="21" name="PlaceHolder 1"/>
+          <p:cNvPr id="2" name="Title 1">
+            <a:extLst>
+              <a:ext uri="{FF2B5EF4-FFF2-40B4-BE49-F238E27FC236}">
+                <a16:creationId xmlns:a16="http://schemas.microsoft.com/office/drawing/2014/main" id="{6344C321-03CF-B08E-A31A-ECB533EA3273}"/>
+              </a:ext>
+            </a:extLst>
+          </p:cNvPr>
+          <p:cNvSpPr>
+            <a:spLocks noGrp="1"/>
+          </p:cNvSpPr>
+          <p:nvPr>
+            <p:ph type="title"/>
+          </p:nvPr>
+        </p:nvSpPr>
+        <p:spPr/>
+        <p:txBody>
+          <a:bodyPr/>
+          <a:lstStyle/>
+          <a:p>
+            <a:r>
+              <a:rPr lang="en-US" dirty="0"/>
+              <a:t>Data Fields</a:t>
+            </a:r>
+          </a:p>
+        </p:txBody>
+      </p:sp>
+      <p:sp>
+        <p:nvSpPr>
+          <p:cNvPr id="3" name="Content Placeholder 2">
+            <a:extLst>
+              <a:ext uri="{FF2B5EF4-FFF2-40B4-BE49-F238E27FC236}">
+                <a16:creationId xmlns:a16="http://schemas.microsoft.com/office/drawing/2014/main" id="{ED4541D5-4A5B-55B8-1379-EB43DF2A137E}"/>
+              </a:ext>
+            </a:extLst>
+          </p:cNvPr>
+          <p:cNvSpPr>
+            <a:spLocks noGrp="1"/>
+          </p:cNvSpPr>
+          <p:nvPr>
+            <p:ph sz="half" idx="1"/>
+          </p:nvPr>
+        </p:nvSpPr>
+        <p:spPr/>
+        <p:txBody>
+          <a:bodyPr>
+            <a:normAutofit fontScale="77500" lnSpcReduction="20000"/>
+          </a:bodyPr>
+          <a:lstStyle/>
+          <a:p>
+            <a:pPr marL="432000" indent="-324000">
+              <a:lnSpc>
+                <a:spcPct val="100000"/>
+              </a:lnSpc>
+              <a:spcBef>
+                <a:spcPts val="1191"/>
+              </a:spcBef>
+              <a:spcAft>
+                <a:spcPts val="992"/>
+              </a:spcAft>
+            </a:pPr>
+            <a:r>
+              <a:rPr lang="en-US" sz="1400" dirty="0"/>
+              <a:t>Year - The manufacturing year of the vehicle.</a:t>
+            </a:r>
+          </a:p>
+          <a:p>
+            <a:pPr marL="432000" indent="-324000">
+              <a:lnSpc>
+                <a:spcPct val="100000"/>
+              </a:lnSpc>
+              <a:spcBef>
+                <a:spcPts val="1191"/>
+              </a:spcBef>
+              <a:spcAft>
+                <a:spcPts val="992"/>
+              </a:spcAft>
+            </a:pPr>
+            <a:r>
+              <a:rPr lang="en-US" sz="1400" dirty="0"/>
+              <a:t>Make - The brand or manufacturer of the vehicle.</a:t>
+            </a:r>
+          </a:p>
+          <a:p>
+            <a:pPr marL="432000" indent="-324000">
+              <a:lnSpc>
+                <a:spcPct val="100000"/>
+              </a:lnSpc>
+              <a:spcBef>
+                <a:spcPts val="1191"/>
+              </a:spcBef>
+              <a:spcAft>
+                <a:spcPts val="992"/>
+              </a:spcAft>
+            </a:pPr>
+            <a:r>
+              <a:rPr lang="en-US" sz="1400" dirty="0"/>
+              <a:t>Model - The specific model of the vehicle.</a:t>
+            </a:r>
+          </a:p>
+          <a:p>
+            <a:pPr marL="432000" indent="-324000">
+              <a:lnSpc>
+                <a:spcPct val="100000"/>
+              </a:lnSpc>
+              <a:spcBef>
+                <a:spcPts val="1191"/>
+              </a:spcBef>
+              <a:spcAft>
+                <a:spcPts val="992"/>
+              </a:spcAft>
+            </a:pPr>
+            <a:r>
+              <a:rPr lang="en-US" sz="1400" dirty="0"/>
+              <a:t>Trim - Additional designation for the vehicle model.</a:t>
+            </a:r>
+          </a:p>
+          <a:p>
+            <a:pPr marL="432000" indent="-324000">
+              <a:lnSpc>
+                <a:spcPct val="100000"/>
+              </a:lnSpc>
+              <a:spcBef>
+                <a:spcPts val="1191"/>
+              </a:spcBef>
+              <a:spcAft>
+                <a:spcPts val="992"/>
+              </a:spcAft>
+            </a:pPr>
+            <a:r>
+              <a:rPr lang="en-US" sz="1400" dirty="0"/>
+              <a:t>Body - The body type of the vehicle (e.g., SUV, Sedan).</a:t>
+            </a:r>
+          </a:p>
+          <a:p>
+            <a:pPr marL="432000" indent="-324000">
+              <a:lnSpc>
+                <a:spcPct val="100000"/>
+              </a:lnSpc>
+              <a:spcBef>
+                <a:spcPts val="1191"/>
+              </a:spcBef>
+              <a:spcAft>
+                <a:spcPts val="992"/>
+              </a:spcAft>
+            </a:pPr>
+            <a:r>
+              <a:rPr lang="en-US" sz="1400" dirty="0"/>
+              <a:t>Transmission - The type of transmission in the vehicle (e.g., automatic).</a:t>
+            </a:r>
+          </a:p>
+          <a:p>
+            <a:pPr marL="432000" indent="-324000">
+              <a:lnSpc>
+                <a:spcPct val="100000"/>
+              </a:lnSpc>
+              <a:spcBef>
+                <a:spcPts val="1191"/>
+              </a:spcBef>
+              <a:spcAft>
+                <a:spcPts val="992"/>
+              </a:spcAft>
+            </a:pPr>
+            <a:r>
+              <a:rPr lang="en-US" sz="1400" dirty="0"/>
+              <a:t>Vin - Vehicle Identification Number, a unique code for each vehicle.</a:t>
+            </a:r>
+          </a:p>
+          <a:p>
+            <a:pPr marL="432000" indent="-324000">
+              <a:lnSpc>
+                <a:spcPct val="100000"/>
+              </a:lnSpc>
+              <a:spcBef>
+                <a:spcPts val="1191"/>
+              </a:spcBef>
+              <a:spcAft>
+                <a:spcPts val="992"/>
+              </a:spcAft>
+            </a:pPr>
+            <a:r>
+              <a:rPr lang="en-US" sz="1400" dirty="0"/>
+              <a:t>State - The state where the vehicle is registered.</a:t>
+            </a:r>
+          </a:p>
+        </p:txBody>
+      </p:sp>
+      <p:sp>
+        <p:nvSpPr>
+          <p:cNvPr id="4" name="Content Placeholder 3">
+            <a:extLst>
+              <a:ext uri="{FF2B5EF4-FFF2-40B4-BE49-F238E27FC236}">
+                <a16:creationId xmlns:a16="http://schemas.microsoft.com/office/drawing/2014/main" id="{372BF395-DA7A-D826-005F-94865F5B2CC9}"/>
+              </a:ext>
+            </a:extLst>
+          </p:cNvPr>
+          <p:cNvSpPr>
+            <a:spLocks noGrp="1"/>
+          </p:cNvSpPr>
+          <p:nvPr>
+            <p:ph sz="half" idx="2"/>
+          </p:nvPr>
+        </p:nvSpPr>
+        <p:spPr/>
+        <p:txBody>
+          <a:bodyPr>
+            <a:normAutofit fontScale="77500" lnSpcReduction="20000"/>
+          </a:bodyPr>
+          <a:lstStyle/>
+          <a:p>
+            <a:pPr marL="432000" indent="-324000">
+              <a:lnSpc>
+                <a:spcPct val="120000"/>
+              </a:lnSpc>
+              <a:spcBef>
+                <a:spcPts val="1191"/>
+              </a:spcBef>
+              <a:spcAft>
+                <a:spcPts val="992"/>
+              </a:spcAft>
+            </a:pPr>
+            <a:r>
+              <a:rPr lang="en-US" sz="1400" dirty="0"/>
+              <a:t>Condition - Condition of the vehicle, possibly rated on a scale of 1 - 50.</a:t>
+            </a:r>
+          </a:p>
+          <a:p>
+            <a:pPr marL="432000" indent="-324000">
+              <a:lnSpc>
+                <a:spcPct val="120000"/>
+              </a:lnSpc>
+              <a:spcBef>
+                <a:spcPts val="1191"/>
+              </a:spcBef>
+              <a:spcAft>
+                <a:spcPts val="992"/>
+              </a:spcAft>
+            </a:pPr>
+            <a:r>
+              <a:rPr lang="en-US" sz="1400" dirty="0"/>
+              <a:t>Odometer - The mileage or distance traveled by the vehicle.</a:t>
+            </a:r>
+          </a:p>
+          <a:p>
+            <a:pPr marL="432000" indent="-324000">
+              <a:lnSpc>
+                <a:spcPct val="120000"/>
+              </a:lnSpc>
+              <a:spcBef>
+                <a:spcPts val="1191"/>
+              </a:spcBef>
+              <a:spcAft>
+                <a:spcPts val="992"/>
+              </a:spcAft>
+            </a:pPr>
+            <a:r>
+              <a:rPr lang="en-US" sz="1400" dirty="0"/>
+              <a:t>Color - Exterior color of the vehicle.</a:t>
+            </a:r>
+          </a:p>
+          <a:p>
+            <a:pPr marL="432000" indent="-324000">
+              <a:lnSpc>
+                <a:spcPct val="120000"/>
+              </a:lnSpc>
+              <a:spcBef>
+                <a:spcPts val="1191"/>
+              </a:spcBef>
+              <a:spcAft>
+                <a:spcPts val="992"/>
+              </a:spcAft>
+            </a:pPr>
+            <a:r>
+              <a:rPr lang="en-US" sz="1400" dirty="0"/>
+              <a:t>Interior - Interior color of the vehicle.</a:t>
+            </a:r>
+          </a:p>
+          <a:p>
+            <a:pPr marL="432000" indent="-324000">
+              <a:lnSpc>
+                <a:spcPct val="120000"/>
+              </a:lnSpc>
+              <a:spcBef>
+                <a:spcPts val="1191"/>
+              </a:spcBef>
+              <a:spcAft>
+                <a:spcPts val="992"/>
+              </a:spcAft>
+            </a:pPr>
+            <a:r>
+              <a:rPr lang="en-US" sz="1400" dirty="0"/>
+              <a:t>Seller - The entity selling the vehicle.</a:t>
+            </a:r>
+          </a:p>
+          <a:p>
+            <a:pPr marL="432000" indent="-324000">
+              <a:lnSpc>
+                <a:spcPct val="120000"/>
+              </a:lnSpc>
+              <a:spcBef>
+                <a:spcPts val="1191"/>
+              </a:spcBef>
+              <a:spcAft>
+                <a:spcPts val="992"/>
+              </a:spcAft>
+            </a:pPr>
+            <a:r>
+              <a:rPr lang="en-US" sz="1400" dirty="0"/>
+              <a:t>MMR - Manheim Market Report, possibly indicating the estimated market value of the vehicle.</a:t>
+            </a:r>
+          </a:p>
+          <a:p>
+            <a:pPr marL="432000" indent="-324000">
+              <a:lnSpc>
+                <a:spcPct val="120000"/>
+              </a:lnSpc>
+              <a:spcBef>
+                <a:spcPts val="1191"/>
+              </a:spcBef>
+              <a:spcAft>
+                <a:spcPts val="992"/>
+              </a:spcAft>
+            </a:pPr>
+            <a:r>
+              <a:rPr lang="en-US" sz="1400" dirty="0"/>
+              <a:t>Selling Price - The price at which the vehicle was sold.</a:t>
+            </a:r>
+          </a:p>
+          <a:p>
+            <a:pPr>
+              <a:lnSpc>
+                <a:spcPct val="120000"/>
+              </a:lnSpc>
+            </a:pPr>
+            <a:endParaRPr lang="en-US" sz="1400" dirty="0"/>
+          </a:p>
+        </p:txBody>
+      </p:sp>
+    </p:spTree>
+    <p:extLst>
+      <p:ext uri="{BB962C8B-B14F-4D97-AF65-F5344CB8AC3E}">
+        <p14:creationId xmlns:p14="http://schemas.microsoft.com/office/powerpoint/2010/main" val="3599327616"/>
+      </p:ext>
+    </p:extLst>
+  </p:cSld>
+  <p:clrMapOvr>
+    <a:masterClrMapping/>
+  </p:clrMapOvr>
+</p:sld>
+</file>
+
+<file path=ppt/slides/slide2.xml><?xml version="1.0" encoding="utf-8"?>
+<p:sld xmlns:a="http://schemas.openxmlformats.org/drawingml/2006/main" xmlns:r="http://schemas.openxmlformats.org/officeDocument/2006/relationships" xmlns:p="http://schemas.openxmlformats.org/presentationml/2006/main">
+  <p:cSld>
+    <p:spTree>
+      <p:nvGrpSpPr>
+        <p:cNvPr id="1" name=""/>
+        <p:cNvGrpSpPr/>
+        <p:nvPr/>
+      </p:nvGrpSpPr>
+      <p:grpSpPr>
+        <a:xfrm>
+          <a:off x="0" y="0"/>
+          <a:ext cx="0" cy="0"/>
+          <a:chOff x="0" y="0"/>
+          <a:chExt cx="0" cy="0"/>
+        </a:xfrm>
+      </p:grpSpPr>
+      <p:sp>
+        <p:nvSpPr>
+          <p:cNvPr id="13" name="PlaceHolder 1"/>
           <p:cNvSpPr>
             <a:spLocks noGrp="1"/>
           </p:cNvSpPr>
@@ -1985,8 +2491,8 @@
         </p:nvSpPr>
         <p:spPr>
           <a:xfrm>
-            <a:off x="504000" y="226080"/>
-            <a:ext cx="9071640" cy="946440"/>
+            <a:off x="504000" y="394601"/>
+            <a:ext cx="9071640" cy="609398"/>
           </a:xfrm>
           <a:prstGeom prst="rect">
             <a:avLst/>
@@ -2000,12 +2506,13 @@
           <a:bodyPr lIns="0" tIns="0" rIns="0" bIns="0" anchor="ctr">
             <a:spAutoFit/>
           </a:bodyPr>
+          <a:lstStyle/>
           <a:p>
             <a:pPr indent="0" algn="ctr">
               <a:buNone/>
             </a:pPr>
             <a:r>
-              <a:rPr lang="en-US" sz="4400" b="0" u="none" strike="noStrike">
+              <a:rPr lang="en-US" sz="4400" b="0" u="none" strike="noStrike" dirty="0">
                 <a:solidFill>
                   <a:srgbClr val="000000"/>
                 </a:solidFill>
@@ -2013,22 +2520,146 @@
                 <a:uFillTx/>
                 <a:latin typeface="Arial"/>
               </a:rPr>
-              <a:t>(no slide needed) Professionalism</a:t>
-            </a:r>
-            <a:endParaRPr lang="en-US" sz="4400" b="0" u="none" strike="noStrike">
-              <a:solidFill>
+              <a:t>Business Problem</a:t>
+            </a:r>
+          </a:p>
+        </p:txBody>
+      </p:sp>
+      <p:sp>
+        <p:nvSpPr>
+          <p:cNvPr id="14" name="PlaceHolder 2"/>
+          <p:cNvSpPr>
+            <a:spLocks noGrp="1"/>
+          </p:cNvSpPr>
+          <p:nvPr>
+            <p:ph/>
+          </p:nvPr>
+        </p:nvSpPr>
+        <p:spPr>
+          <a:xfrm>
+            <a:off x="457200" y="1371600"/>
+            <a:ext cx="9071640" cy="3288240"/>
+          </a:xfrm>
+          <a:prstGeom prst="rect">
+            <a:avLst/>
+          </a:prstGeom>
+          <a:noFill/>
+          <a:ln w="0">
+            <a:noFill/>
+          </a:ln>
+        </p:spPr>
+        <p:txBody>
+          <a:bodyPr lIns="0" tIns="0" rIns="0" bIns="0" anchor="t">
+            <a:normAutofit fontScale="92500" lnSpcReduction="19999"/>
+          </a:bodyPr>
+          <a:lstStyle/>
+          <a:p>
+            <a:pPr marL="432000" indent="-324000" algn="l">
+              <a:spcBef>
+                <a:spcPts val="1191"/>
+              </a:spcBef>
+              <a:spcAft>
+                <a:spcPts val="992"/>
+              </a:spcAft>
+              <a:buClr>
                 <a:srgbClr val="000000"/>
-              </a:solidFill>
-              <a:effectLst/>
-              <a:uFillTx/>
-              <a:latin typeface="Arial"/>
-            </a:endParaRPr>
-          </a:p>
-        </p:txBody>
-      </p:sp>
-      <p:sp>
-        <p:nvSpPr>
-          <p:cNvPr id="22" name="PlaceHolder 2"/>
+              </a:buClr>
+              <a:buSzPct val="45000"/>
+              <a:buFont typeface="Wingdings" charset="2"/>
+              <a:buChar char=""/>
+            </a:pPr>
+            <a:r>
+              <a:rPr lang="en-US" sz="3200" dirty="0"/>
+              <a:t>A dealership must consistently evaluate customer trade-ins</a:t>
+            </a:r>
+            <a:r>
+              <a:rPr lang="en-US" sz="3200" b="0" u="none" strike="noStrike" dirty="0">
+                <a:solidFill>
+                  <a:srgbClr val="000000"/>
+                </a:solidFill>
+                <a:effectLst/>
+                <a:uFillTx/>
+                <a:latin typeface="Arial"/>
+              </a:rPr>
+              <a:t>. It needs to know what price range could be offered as a trade in based on many factors like model, odometer, condition, age of vehicle.</a:t>
+            </a:r>
+          </a:p>
+        </p:txBody>
+      </p:sp>
+    </p:spTree>
+  </p:cSld>
+  <p:clrMapOvr>
+    <a:masterClrMapping/>
+  </p:clrMapOvr>
+</p:sld>
+</file>
+
+<file path=ppt/slides/slide3.xml><?xml version="1.0" encoding="utf-8"?>
+<p:sld xmlns:a="http://schemas.openxmlformats.org/drawingml/2006/main" xmlns:r="http://schemas.openxmlformats.org/officeDocument/2006/relationships" xmlns:p="http://schemas.openxmlformats.org/presentationml/2006/main">
+  <p:cSld>
+    <p:spTree>
+      <p:nvGrpSpPr>
+        <p:cNvPr id="1" name=""/>
+        <p:cNvGrpSpPr/>
+        <p:nvPr/>
+      </p:nvGrpSpPr>
+      <p:grpSpPr>
+        <a:xfrm>
+          <a:off x="0" y="0"/>
+          <a:ext cx="0" cy="0"/>
+          <a:chOff x="0" y="0"/>
+          <a:chExt cx="0" cy="0"/>
+        </a:xfrm>
+      </p:grpSpPr>
+      <p:sp>
+        <p:nvSpPr>
+          <p:cNvPr id="15" name="PlaceHolder 1"/>
+          <p:cNvSpPr>
+            <a:spLocks noGrp="1"/>
+          </p:cNvSpPr>
+          <p:nvPr>
+            <p:ph type="title"/>
+          </p:nvPr>
+        </p:nvSpPr>
+        <p:spPr>
+          <a:xfrm>
+            <a:off x="504000" y="394601"/>
+            <a:ext cx="9071640" cy="609398"/>
+          </a:xfrm>
+          <a:prstGeom prst="rect">
+            <a:avLst/>
+          </a:prstGeom>
+          <a:noFill/>
+          <a:ln w="0">
+            <a:noFill/>
+          </a:ln>
+        </p:spPr>
+        <p:txBody>
+          <a:bodyPr lIns="0" tIns="0" rIns="0" bIns="0" anchor="ctr">
+            <a:spAutoFit/>
+          </a:bodyPr>
+          <a:lstStyle/>
+          <a:p>
+            <a:pPr indent="0" algn="ctr">
+              <a:buNone/>
+            </a:pPr>
+            <a:r>
+              <a:rPr lang="en-US" sz="4400" b="0" u="none" strike="noStrike" dirty="0">
+                <a:solidFill>
+                  <a:srgbClr val="000000"/>
+                </a:solidFill>
+                <a:effectLst/>
+                <a:uFillTx/>
+                <a:latin typeface="Arial"/>
+              </a:rPr>
+              <a:t>Executive Summary</a:t>
+            </a:r>
+          </a:p>
+        </p:txBody>
+      </p:sp>
+      <p:sp>
+        <p:nvSpPr>
+          <p:cNvPr id="16" name="PlaceHolder 2"/>
           <p:cNvSpPr>
             <a:spLocks noGrp="1"/>
           </p:cNvSpPr>
@@ -2051,8 +2682,9 @@
         </p:spPr>
         <p:txBody>
           <a:bodyPr lIns="0" tIns="0" rIns="0" bIns="0" anchor="t">
-            <a:normAutofit fontScale="85000" lnSpcReduction="9999"/>
+            <a:normAutofit fontScale="92500" lnSpcReduction="9999"/>
           </a:bodyPr>
+          <a:lstStyle/>
           <a:p>
             <a:pPr marL="432000" indent="-324000" algn="l">
               <a:spcBef>
@@ -2069,24 +2701,9 @@
               <a:buChar char=""/>
             </a:pPr>
             <a:r>
-              <a:rPr lang="en-US" sz="2000" b="0" u="none" strike="noStrike">
-                <a:solidFill>
-                  <a:srgbClr val="000000"/>
-                </a:solidFill>
-                <a:effectLst/>
-                <a:uFillTx/>
-                <a:latin typeface="Arial"/>
-              </a:rPr>
-              <a:t>Know your audience. You need to present in a way so that everyone can understand the essentials of what you're doing, if not all of the details.</a:t>
-            </a:r>
-            <a:endParaRPr lang="en-US" sz="2000" b="0" u="none" strike="noStrike">
-              <a:solidFill>
-                <a:srgbClr val="000000"/>
-              </a:solidFill>
-              <a:effectLst/>
-              <a:uFillTx/>
-              <a:latin typeface="Arial"/>
-            </a:endParaRPr>
+              <a:rPr lang="en-US" sz="3200" dirty="0"/>
+              <a:t>The most valuable vehicles for trade-in are nearly all trucks.</a:t>
+            </a:r>
           </a:p>
           <a:p>
             <a:pPr marL="432000" indent="-324000" algn="l">
@@ -2104,7 +2721,7 @@
               <a:buChar char=""/>
             </a:pPr>
             <a:r>
-              <a:rPr lang="en-US" sz="2000" b="0" u="none" strike="noStrike">
+              <a:rPr lang="en-US" sz="3200" b="0" u="none" strike="noStrike" dirty="0">
                 <a:solidFill>
                   <a:srgbClr val="000000"/>
                 </a:solidFill>
@@ -2112,9 +2729,13 @@
                 <a:uFillTx/>
                 <a:latin typeface="Arial"/>
               </a:rPr>
-              <a:t>Polish is essential. The presentation needs to look good. It will enhance the credibility of what you're saying. Try not to give your audience any reason to doubt what you're trying to communicate.</a:t>
-            </a:r>
-            <a:endParaRPr lang="en-US" sz="2000" b="0" u="none" strike="noStrike">
+              <a:t>Model and age are </a:t>
+            </a:r>
+            <a:r>
+              <a:rPr lang="en-US" sz="3200" dirty="0"/>
+              <a:t>two most important factors in determining trade-in value.</a:t>
+            </a:r>
+            <a:endParaRPr lang="en-US" sz="3200" b="0" u="none" strike="noStrike" dirty="0">
               <a:solidFill>
                 <a:srgbClr val="000000"/>
               </a:solidFill>
@@ -2123,8 +2744,352 @@
               <a:latin typeface="Arial"/>
             </a:endParaRPr>
           </a:p>
+        </p:txBody>
+      </p:sp>
+    </p:spTree>
+  </p:cSld>
+  <p:clrMapOvr>
+    <a:masterClrMapping/>
+  </p:clrMapOvr>
+</p:sld>
+</file>
+
+<file path=ppt/slides/slide4.xml><?xml version="1.0" encoding="utf-8"?>
+<p:sld xmlns:a="http://schemas.openxmlformats.org/drawingml/2006/main" xmlns:r="http://schemas.openxmlformats.org/officeDocument/2006/relationships" xmlns:p="http://schemas.openxmlformats.org/presentationml/2006/main">
+  <p:cSld>
+    <p:spTree>
+      <p:nvGrpSpPr>
+        <p:cNvPr id="1" name="">
+          <a:extLst>
+            <a:ext uri="{FF2B5EF4-FFF2-40B4-BE49-F238E27FC236}">
+              <a16:creationId xmlns:a16="http://schemas.microsoft.com/office/drawing/2014/main" id="{9FA018E7-81CE-2578-811C-4009B8CB2434}"/>
+            </a:ext>
+          </a:extLst>
+        </p:cNvPr>
+        <p:cNvGrpSpPr/>
+        <p:nvPr/>
+      </p:nvGrpSpPr>
+      <p:grpSpPr>
+        <a:xfrm>
+          <a:off x="0" y="0"/>
+          <a:ext cx="0" cy="0"/>
+          <a:chOff x="0" y="0"/>
+          <a:chExt cx="0" cy="0"/>
+        </a:xfrm>
+      </p:grpSpPr>
+      <p:sp>
+        <p:nvSpPr>
+          <p:cNvPr id="2" name="Title 1">
+            <a:extLst>
+              <a:ext uri="{FF2B5EF4-FFF2-40B4-BE49-F238E27FC236}">
+                <a16:creationId xmlns:a16="http://schemas.microsoft.com/office/drawing/2014/main" id="{1528FF21-E9A6-BAA7-68A5-6E0CC68D1CF5}"/>
+              </a:ext>
+            </a:extLst>
+          </p:cNvPr>
+          <p:cNvSpPr>
+            <a:spLocks noGrp="1"/>
+          </p:cNvSpPr>
+          <p:nvPr>
+            <p:ph type="title"/>
+          </p:nvPr>
+        </p:nvSpPr>
+        <p:spPr/>
+        <p:txBody>
+          <a:bodyPr/>
+          <a:lstStyle/>
+          <a:p>
+            <a:r>
+              <a:rPr lang="en-US" dirty="0"/>
+              <a:t>Data Summary</a:t>
+            </a:r>
+          </a:p>
+        </p:txBody>
+      </p:sp>
+      <p:sp>
+        <p:nvSpPr>
+          <p:cNvPr id="3" name="Content Placeholder 2">
+            <a:extLst>
+              <a:ext uri="{FF2B5EF4-FFF2-40B4-BE49-F238E27FC236}">
+                <a16:creationId xmlns:a16="http://schemas.microsoft.com/office/drawing/2014/main" id="{3FBE699B-090E-2C59-BA6F-EC1185BA4784}"/>
+              </a:ext>
+            </a:extLst>
+          </p:cNvPr>
+          <p:cNvSpPr>
+            <a:spLocks noGrp="1"/>
+          </p:cNvSpPr>
+          <p:nvPr>
+            <p:ph sz="half" idx="1"/>
+          </p:nvPr>
+        </p:nvSpPr>
+        <p:spPr>
+          <a:xfrm>
+            <a:off x="693043" y="1509521"/>
+            <a:ext cx="8395834" cy="3597912"/>
+          </a:xfrm>
+        </p:spPr>
+        <p:txBody>
+          <a:bodyPr>
+            <a:normAutofit/>
+          </a:bodyPr>
+          <a:lstStyle/>
+          <a:p>
+            <a:pPr marL="432000" indent="-324000">
+              <a:lnSpc>
+                <a:spcPct val="100000"/>
+              </a:lnSpc>
+              <a:spcBef>
+                <a:spcPts val="1191"/>
+              </a:spcBef>
+              <a:spcAft>
+                <a:spcPts val="992"/>
+              </a:spcAft>
+            </a:pPr>
+            <a:r>
+              <a:rPr lang="en-US" sz="1400" dirty="0"/>
+              <a:t>Nearly all used car sales data from 2015</a:t>
+            </a:r>
+          </a:p>
+          <a:p>
+            <a:pPr marL="432000" indent="-324000">
+              <a:lnSpc>
+                <a:spcPct val="100000"/>
+              </a:lnSpc>
+              <a:spcBef>
+                <a:spcPts val="1191"/>
+              </a:spcBef>
+              <a:spcAft>
+                <a:spcPts val="992"/>
+              </a:spcAft>
+            </a:pPr>
+            <a:r>
+              <a:rPr lang="en-US" sz="1400" dirty="0"/>
+              <a:t>Vehicle years range from 1996 to 2015</a:t>
+            </a:r>
+          </a:p>
+          <a:p>
+            <a:pPr marL="432000" indent="-324000">
+              <a:lnSpc>
+                <a:spcPct val="100000"/>
+              </a:lnSpc>
+              <a:spcBef>
+                <a:spcPts val="1191"/>
+              </a:spcBef>
+              <a:spcAft>
+                <a:spcPts val="992"/>
+              </a:spcAft>
+            </a:pPr>
+            <a:r>
+              <a:rPr lang="en-US" sz="1400" dirty="0"/>
+              <a:t>Contains sales data from 34 different states in the US</a:t>
+            </a:r>
+          </a:p>
+          <a:p>
+            <a:pPr marL="432000" indent="-324000">
+              <a:lnSpc>
+                <a:spcPct val="100000"/>
+              </a:lnSpc>
+              <a:spcBef>
+                <a:spcPts val="1191"/>
+              </a:spcBef>
+              <a:spcAft>
+                <a:spcPts val="992"/>
+              </a:spcAft>
+            </a:pPr>
+            <a:r>
+              <a:rPr lang="en-US" sz="1400" dirty="0"/>
+              <a:t>Main data points were vehicle age, odometer, condition, model</a:t>
+            </a:r>
+          </a:p>
+          <a:p>
+            <a:pPr marL="432000" indent="-324000">
+              <a:lnSpc>
+                <a:spcPct val="100000"/>
+              </a:lnSpc>
+              <a:spcBef>
+                <a:spcPts val="1191"/>
+              </a:spcBef>
+              <a:spcAft>
+                <a:spcPts val="992"/>
+              </a:spcAft>
+            </a:pPr>
+            <a:r>
+              <a:rPr lang="en-US" sz="1400" dirty="0"/>
+              <a:t>Cleaned data contained over 470,000 transactions</a:t>
+            </a:r>
+          </a:p>
+          <a:p>
+            <a:pPr marL="432000" indent="-324000">
+              <a:lnSpc>
+                <a:spcPct val="100000"/>
+              </a:lnSpc>
+              <a:spcBef>
+                <a:spcPts val="1191"/>
+              </a:spcBef>
+              <a:spcAft>
+                <a:spcPts val="992"/>
+              </a:spcAft>
+            </a:pPr>
+            <a:endParaRPr lang="en-US" sz="1400" dirty="0"/>
+          </a:p>
+        </p:txBody>
+      </p:sp>
+      <p:pic>
+        <p:nvPicPr>
+          <p:cNvPr id="10" name="Picture 9">
+            <a:extLst>
+              <a:ext uri="{FF2B5EF4-FFF2-40B4-BE49-F238E27FC236}">
+                <a16:creationId xmlns:a16="http://schemas.microsoft.com/office/drawing/2014/main" id="{0D7CDF7C-31CE-49A7-96E7-5640CC07A388}"/>
+              </a:ext>
+            </a:extLst>
+          </p:cNvPr>
+          <p:cNvPicPr>
+            <a:picLocks noChangeAspect="1"/>
+          </p:cNvPicPr>
+          <p:nvPr/>
+        </p:nvPicPr>
+        <p:blipFill>
+          <a:blip r:embed="rId2"/>
+          <a:stretch>
+            <a:fillRect/>
+          </a:stretch>
+        </p:blipFill>
+        <p:spPr>
+          <a:xfrm>
+            <a:off x="6287310" y="1222029"/>
+            <a:ext cx="3310569" cy="3337001"/>
+          </a:xfrm>
+          <a:prstGeom prst="rect">
+            <a:avLst/>
+          </a:prstGeom>
+        </p:spPr>
+      </p:pic>
+    </p:spTree>
+    <p:extLst>
+      <p:ext uri="{BB962C8B-B14F-4D97-AF65-F5344CB8AC3E}">
+        <p14:creationId xmlns:p14="http://schemas.microsoft.com/office/powerpoint/2010/main" val="3056190098"/>
+      </p:ext>
+    </p:extLst>
+  </p:cSld>
+  <p:clrMapOvr>
+    <a:masterClrMapping/>
+  </p:clrMapOvr>
+</p:sld>
+</file>
+
+<file path=ppt/slides/slide5.xml><?xml version="1.0" encoding="utf-8"?>
+<p:sld xmlns:a="http://schemas.openxmlformats.org/drawingml/2006/main" xmlns:r="http://schemas.openxmlformats.org/officeDocument/2006/relationships" xmlns:p="http://schemas.openxmlformats.org/presentationml/2006/main">
+  <p:cSld>
+    <p:spTree>
+      <p:nvGrpSpPr>
+        <p:cNvPr id="1" name="">
+          <a:extLst>
+            <a:ext uri="{FF2B5EF4-FFF2-40B4-BE49-F238E27FC236}">
+              <a16:creationId xmlns:a16="http://schemas.microsoft.com/office/drawing/2014/main" id="{E167FE60-E518-FC45-C2CE-3F91577075A4}"/>
+            </a:ext>
+          </a:extLst>
+        </p:cNvPr>
+        <p:cNvGrpSpPr/>
+        <p:nvPr/>
+      </p:nvGrpSpPr>
+      <p:grpSpPr>
+        <a:xfrm>
+          <a:off x="0" y="0"/>
+          <a:ext cx="0" cy="0"/>
+          <a:chOff x="0" y="0"/>
+          <a:chExt cx="0" cy="0"/>
+        </a:xfrm>
+      </p:grpSpPr>
+      <p:sp>
+        <p:nvSpPr>
+          <p:cNvPr id="17" name="PlaceHolder 1">
+            <a:extLst>
+              <a:ext uri="{FF2B5EF4-FFF2-40B4-BE49-F238E27FC236}">
+                <a16:creationId xmlns:a16="http://schemas.microsoft.com/office/drawing/2014/main" id="{151847F1-B534-7474-B750-84E121455160}"/>
+              </a:ext>
+            </a:extLst>
+          </p:cNvPr>
+          <p:cNvSpPr>
+            <a:spLocks noGrp="1"/>
+          </p:cNvSpPr>
+          <p:nvPr>
+            <p:ph type="title"/>
+          </p:nvPr>
+        </p:nvSpPr>
+        <p:spPr>
+          <a:xfrm>
+            <a:off x="504000" y="394601"/>
+            <a:ext cx="9071640" cy="609398"/>
+          </a:xfrm>
+          <a:prstGeom prst="rect">
+            <a:avLst/>
+          </a:prstGeom>
+          <a:noFill/>
+          <a:ln w="0">
+            <a:noFill/>
+          </a:ln>
+        </p:spPr>
+        <p:txBody>
+          <a:bodyPr lIns="0" tIns="0" rIns="0" bIns="0" anchor="ctr">
+            <a:spAutoFit/>
+          </a:bodyPr>
+          <a:lstStyle/>
+          <a:p>
+            <a:pPr indent="0" algn="ctr">
+              <a:buNone/>
+            </a:pPr>
+            <a:r>
+              <a:rPr lang="en-US" sz="4400" b="0" u="none" strike="noStrike" dirty="0">
+                <a:solidFill>
+                  <a:srgbClr val="000000"/>
+                </a:solidFill>
+                <a:effectLst/>
+                <a:uFillTx/>
+                <a:latin typeface="Arial"/>
+              </a:rPr>
+              <a:t>Data Preparation</a:t>
+            </a:r>
+          </a:p>
+        </p:txBody>
+      </p:sp>
+      <p:sp>
+        <p:nvSpPr>
+          <p:cNvPr id="18" name="PlaceHolder 2">
+            <a:extLst>
+              <a:ext uri="{FF2B5EF4-FFF2-40B4-BE49-F238E27FC236}">
+                <a16:creationId xmlns:a16="http://schemas.microsoft.com/office/drawing/2014/main" id="{976CED2D-1BBE-EAE8-BB21-A20F4379FA10}"/>
+              </a:ext>
+            </a:extLst>
+          </p:cNvPr>
+          <p:cNvSpPr>
+            <a:spLocks noGrp="1"/>
+          </p:cNvSpPr>
+          <p:nvPr>
+            <p:ph/>
+          </p:nvPr>
+        </p:nvSpPr>
+        <p:spPr>
+          <a:xfrm>
+            <a:off x="504000" y="1326600"/>
+            <a:ext cx="9071640" cy="3288240"/>
+          </a:xfrm>
+          <a:prstGeom prst="rect">
+            <a:avLst/>
+          </a:prstGeom>
+          <a:noFill/>
+          <a:ln w="0">
+            <a:noFill/>
+          </a:ln>
+        </p:spPr>
+        <p:txBody>
+          <a:bodyPr lIns="0" tIns="0" rIns="0" bIns="0" anchor="t">
+            <a:noAutofit/>
+          </a:bodyPr>
+          <a:lstStyle/>
           <a:p>
             <a:pPr marL="432000" indent="-324000" algn="l">
+              <a:lnSpc>
+                <a:spcPct val="40000"/>
+              </a:lnSpc>
               <a:spcBef>
                 <a:spcPts val="1191"/>
               </a:spcBef>
@@ -2139,27 +3104,23 @@
               <a:buChar char=""/>
             </a:pPr>
             <a:r>
-              <a:rPr lang="en-US" sz="2000" b="0" u="none" strike="noStrike">
-                <a:solidFill>
-                  <a:srgbClr val="000000"/>
-                </a:solidFill>
-                <a:effectLst/>
-                <a:uFillTx/>
-                <a:latin typeface="Arial"/>
-              </a:rPr>
-              <a:t>Remember the medium. A presentation is not a report or a lecture. Be succinct. Remember that people can't listen to you and read at the same time.</a:t>
-            </a:r>
-            <a:endParaRPr lang="en-US" sz="2000" b="0" u="none" strike="noStrike">
-              <a:solidFill>
-                <a:srgbClr val="000000"/>
-              </a:solidFill>
-              <a:effectLst/>
-              <a:uFillTx/>
-              <a:latin typeface="Arial"/>
-            </a:endParaRPr>
+              <a:rPr lang="en-US" sz="1200" dirty="0"/>
+              <a:t>Normalized make – ford truck, ford </a:t>
+            </a:r>
+            <a:r>
+              <a:rPr lang="en-US" sz="1200" dirty="0" err="1"/>
+              <a:t>tk</a:t>
+            </a:r>
+            <a:r>
+              <a:rPr lang="en-US" sz="1200" dirty="0"/>
+              <a:t> changed to ford</a:t>
+            </a:r>
           </a:p>
           <a:p>
             <a:pPr marL="432000" indent="-324000" algn="l">
+              <a:lnSpc>
+                <a:spcPct val="40000"/>
+              </a:lnSpc>
               <a:spcBef>
                 <a:spcPts val="1191"/>
               </a:spcBef>
@@ -2174,7 +3135,7 @@
               <a:buChar char=""/>
             </a:pPr>
             <a:r>
-              <a:rPr lang="en-US" sz="2000" b="0" u="none" strike="noStrike">
+              <a:rPr lang="en-US" sz="1200" b="0" u="none" strike="noStrike" dirty="0">
                 <a:solidFill>
                   <a:srgbClr val="000000"/>
                 </a:solidFill>
@@ -2182,19 +3143,36 @@
                 <a:uFillTx/>
                 <a:latin typeface="Arial"/>
               </a:rPr>
-              <a:t>Do your best to make technical concepts accessible to those who may be less technical. Highlight technical details or use callouts to parse challenging visualizations or concepts.</a:t>
-            </a:r>
-            <a:endParaRPr lang="en-US" sz="2000" b="0" u="none" strike="noStrike">
-              <a:solidFill>
-                <a:srgbClr val="000000"/>
-              </a:solidFill>
-              <a:effectLst/>
-              <a:uFillTx/>
-              <a:latin typeface="Arial"/>
-            </a:endParaRPr>
+              <a:t>Normalized body – model specific bodies such as </a:t>
+            </a:r>
+            <a:r>
+              <a:rPr lang="en-US" sz="1200" b="0" u="none" strike="noStrike" dirty="0" err="1">
+                <a:solidFill>
+                  <a:srgbClr val="000000"/>
+                </a:solidFill>
+                <a:effectLst/>
+                <a:uFillTx/>
+                <a:latin typeface="Arial"/>
+              </a:rPr>
+              <a:t>cts</a:t>
+            </a:r>
+            <a:r>
+              <a:rPr lang="en-US" sz="1200" b="0" u="none" strike="noStrike" dirty="0">
+                <a:solidFill>
+                  <a:srgbClr val="000000"/>
+                </a:solidFill>
+                <a:effectLst/>
+                <a:uFillTx/>
+                <a:latin typeface="Arial"/>
+              </a:rPr>
+              <a:t> coupe and g37 convertible changed to just coupe and convertible</a:t>
+            </a:r>
           </a:p>
           <a:p>
             <a:pPr marL="432000" indent="-324000" algn="l">
+              <a:lnSpc>
+                <a:spcPct val="40000"/>
+              </a:lnSpc>
               <a:spcBef>
                 <a:spcPts val="1191"/>
               </a:spcBef>
@@ -2209,27 +3187,15 @@
               <a:buChar char=""/>
             </a:pPr>
             <a:r>
-              <a:rPr lang="en-US" sz="2000" b="0" u="none" strike="noStrike">
-                <a:solidFill>
-                  <a:srgbClr val="000000"/>
-                </a:solidFill>
-                <a:effectLst/>
-                <a:uFillTx/>
-                <a:latin typeface="Arial"/>
-              </a:rPr>
-              <a:t>Don't overpromise. Be transparent about uncertainty.</a:t>
-            </a:r>
-            <a:endParaRPr lang="en-US" sz="2000" b="0" u="none" strike="noStrike">
-              <a:solidFill>
-                <a:srgbClr val="000000"/>
-              </a:solidFill>
-              <a:effectLst/>
-              <a:uFillTx/>
-              <a:latin typeface="Arial"/>
-            </a:endParaRPr>
+              <a:rPr lang="en-US" sz="1200" dirty="0"/>
+              <a:t>Dropped nulls from many columns</a:t>
+            </a:r>
           </a:p>
           <a:p>
             <a:pPr marL="432000" indent="-324000" algn="l">
+              <a:lnSpc>
+                <a:spcPct val="40000"/>
+              </a:lnSpc>
               <a:spcBef>
                 <a:spcPts val="1191"/>
               </a:spcBef>
@@ -2244,7 +3210,11 @@
               <a:buChar char=""/>
             </a:pPr>
             <a:r>
-              <a:rPr lang="en-US" sz="2000" b="0" u="none" strike="noStrike">
+              <a:rPr lang="en-US" sz="1200" dirty="0"/>
+              <a:t>Removed</a:t>
+            </a:r>
+            <a:r>
+              <a:rPr lang="en-US" sz="1200" b="0" u="none" strike="noStrike" dirty="0">
                 <a:solidFill>
                   <a:srgbClr val="000000"/>
                 </a:solidFill>
@@ -2252,9 +3222,175 @@
                 <a:uFillTx/>
                 <a:latin typeface="Arial"/>
               </a:rPr>
-              <a:t>Make sure you leave time for questions (1 or 2 minutes in our case).</a:t>
-            </a:r>
-            <a:endParaRPr lang="en-US" sz="2000" b="0" u="none" strike="noStrike">
+              <a:t> extra characters and spacing from values</a:t>
+            </a:r>
+          </a:p>
+          <a:p>
+            <a:pPr marL="432000" indent="-324000" algn="l">
+              <a:lnSpc>
+                <a:spcPct val="40000"/>
+              </a:lnSpc>
+              <a:spcBef>
+                <a:spcPts val="1191"/>
+              </a:spcBef>
+              <a:spcAft>
+                <a:spcPts val="992"/>
+              </a:spcAft>
+              <a:buClr>
+                <a:srgbClr val="000000"/>
+              </a:buClr>
+              <a:buSzPct val="45000"/>
+              <a:buFont typeface="Wingdings" charset="2"/>
+              <a:buChar char=""/>
+            </a:pPr>
+            <a:r>
+              <a:rPr lang="en-US" sz="1200" b="0" u="none" strike="noStrike" dirty="0">
+                <a:solidFill>
+                  <a:srgbClr val="000000"/>
+                </a:solidFill>
+                <a:effectLst/>
+                <a:uFillTx/>
+                <a:latin typeface="Arial"/>
+              </a:rPr>
+              <a:t>Lowercased many of the values for consistency</a:t>
+            </a:r>
+          </a:p>
+          <a:p>
+            <a:pPr marL="432000" indent="-324000" algn="l">
+              <a:lnSpc>
+                <a:spcPct val="40000"/>
+              </a:lnSpc>
+              <a:spcBef>
+                <a:spcPts val="1191"/>
+              </a:spcBef>
+              <a:spcAft>
+                <a:spcPts val="992"/>
+              </a:spcAft>
+              <a:buClr>
+                <a:srgbClr val="000000"/>
+              </a:buClr>
+              <a:buSzPct val="45000"/>
+              <a:buFont typeface="Wingdings" charset="2"/>
+              <a:buChar char=""/>
+            </a:pPr>
+            <a:r>
+              <a:rPr lang="en-US" sz="1200" b="0" u="none" strike="noStrike" dirty="0">
+                <a:solidFill>
+                  <a:srgbClr val="000000"/>
+                </a:solidFill>
+                <a:effectLst/>
+                <a:uFillTx/>
+                <a:latin typeface="Arial"/>
+              </a:rPr>
+              <a:t>Normalized colors to consistent values and converted any values like ‘-’ to ‘unknown’</a:t>
+            </a:r>
+          </a:p>
+          <a:p>
+            <a:pPr marL="432000" indent="-324000" algn="l">
+              <a:lnSpc>
+                <a:spcPct val="40000"/>
+              </a:lnSpc>
+              <a:spcBef>
+                <a:spcPts val="1191"/>
+              </a:spcBef>
+              <a:spcAft>
+                <a:spcPts val="992"/>
+              </a:spcAft>
+              <a:buClr>
+                <a:srgbClr val="000000"/>
+              </a:buClr>
+              <a:buSzPct val="45000"/>
+              <a:buFont typeface="Wingdings" charset="2"/>
+              <a:buChar char=""/>
+            </a:pPr>
+            <a:r>
+              <a:rPr lang="en-US" sz="1200" b="0" u="none" strike="noStrike" dirty="0">
+                <a:solidFill>
+                  <a:srgbClr val="000000"/>
+                </a:solidFill>
+                <a:effectLst/>
+                <a:uFillTx/>
+                <a:latin typeface="Arial"/>
+              </a:rPr>
+              <a:t> Pulled the sale year out of the sell date and calculated age of vehicle at time of sale</a:t>
+            </a:r>
+          </a:p>
+          <a:p>
+            <a:pPr marL="432000" indent="-324000" algn="l">
+              <a:lnSpc>
+                <a:spcPct val="40000"/>
+              </a:lnSpc>
+              <a:spcBef>
+                <a:spcPts val="1191"/>
+              </a:spcBef>
+              <a:spcAft>
+                <a:spcPts val="992"/>
+              </a:spcAft>
+              <a:buClr>
+                <a:srgbClr val="000000"/>
+              </a:buClr>
+              <a:buSzPct val="45000"/>
+              <a:buFont typeface="Wingdings" charset="2"/>
+              <a:buChar char=""/>
+            </a:pPr>
+            <a:r>
+              <a:rPr lang="en-US" sz="1200" dirty="0"/>
+              <a:t>Dropped redundant features for multicollinearity – make, body</a:t>
+            </a:r>
+          </a:p>
+          <a:p>
+            <a:pPr marL="432000" indent="-324000" algn="l">
+              <a:lnSpc>
+                <a:spcPct val="40000"/>
+              </a:lnSpc>
+              <a:spcBef>
+                <a:spcPts val="1191"/>
+              </a:spcBef>
+              <a:spcAft>
+                <a:spcPts val="992"/>
+              </a:spcAft>
+              <a:buClr>
+                <a:srgbClr val="000000"/>
+              </a:buClr>
+              <a:buSzPct val="45000"/>
+              <a:buFont typeface="Wingdings" charset="2"/>
+              <a:buChar char=""/>
+            </a:pPr>
+            <a:r>
+              <a:rPr lang="en-US" sz="1200" b="0" u="none" strike="noStrike" dirty="0">
+                <a:solidFill>
+                  <a:srgbClr val="000000"/>
+                </a:solidFill>
+                <a:effectLst/>
+                <a:uFillTx/>
+                <a:latin typeface="Arial"/>
+              </a:rPr>
+              <a:t>Transmission and color were dropped due to insignificance. </a:t>
+            </a:r>
+          </a:p>
+          <a:p>
+            <a:pPr marL="432000" indent="-324000" algn="l">
+              <a:lnSpc>
+                <a:spcPct val="40000"/>
+              </a:lnSpc>
+              <a:spcBef>
+                <a:spcPts val="1191"/>
+              </a:spcBef>
+              <a:spcAft>
+                <a:spcPts val="992"/>
+              </a:spcAft>
+              <a:buClr>
+                <a:srgbClr val="000000"/>
+              </a:buClr>
+              <a:buSzPct val="45000"/>
+              <a:buFont typeface="Wingdings" charset="2"/>
+              <a:buChar char=""/>
+            </a:pPr>
+            <a:r>
+              <a:rPr lang="en-US" sz="1200" dirty="0"/>
+              <a:t>MMR (Manheim Market Report) was dropped since it was essentially an estimate of the value that we are modeling</a:t>
+            </a:r>
+            <a:endParaRPr lang="en-US" sz="1200" b="0" u="none" strike="noStrike" dirty="0">
               <a:solidFill>
                 <a:srgbClr val="000000"/>
               </a:solidFill>
@@ -2263,23 +3399,455 @@
               <a:latin typeface="Arial"/>
             </a:endParaRPr>
           </a:p>
+          <a:p>
+            <a:pPr marL="432000" indent="-324000" algn="l">
+              <a:spcBef>
+                <a:spcPts val="1191"/>
+              </a:spcBef>
+              <a:spcAft>
+                <a:spcPts val="992"/>
+              </a:spcAft>
+              <a:buClr>
+                <a:srgbClr val="000000"/>
+              </a:buClr>
+              <a:buSzPct val="45000"/>
+              <a:buFont typeface="Wingdings" charset="2"/>
+              <a:buChar char=""/>
+            </a:pPr>
+            <a:endParaRPr lang="en-US" sz="1200" b="0" u="none" strike="noStrike" dirty="0">
+              <a:solidFill>
+                <a:srgbClr val="000000"/>
+              </a:solidFill>
+              <a:effectLst/>
+              <a:uFillTx/>
+              <a:latin typeface="Arial"/>
+            </a:endParaRPr>
+          </a:p>
         </p:txBody>
       </p:sp>
     </p:spTree>
+    <p:extLst>
+      <p:ext uri="{BB962C8B-B14F-4D97-AF65-F5344CB8AC3E}">
+        <p14:creationId xmlns:p14="http://schemas.microsoft.com/office/powerpoint/2010/main" val="894115584"/>
+      </p:ext>
+    </p:extLst>
   </p:cSld>
-  <mc:AlternateContent>
-    <mc:Choice Requires="p14">
-      <p:transition spd="slow" p14:dur="2000"/>
-    </mc:Choice>
-    <mc:Fallback>
-      <p:transition spd="slow"/>
-    </mc:Fallback>
-  </mc:AlternateContent>
+  <p:clrMapOvr>
+    <a:masterClrMapping/>
+  </p:clrMapOvr>
+</p:sld>
+</file>
+
+<file path=ppt/slides/slide6.xml><?xml version="1.0" encoding="utf-8"?>
+<p:sld xmlns:a="http://schemas.openxmlformats.org/drawingml/2006/main" xmlns:r="http://schemas.openxmlformats.org/officeDocument/2006/relationships" xmlns:p="http://schemas.openxmlformats.org/presentationml/2006/main">
+  <p:cSld>
+    <p:spTree>
+      <p:nvGrpSpPr>
+        <p:cNvPr id="1" name=""/>
+        <p:cNvGrpSpPr/>
+        <p:nvPr/>
+      </p:nvGrpSpPr>
+      <p:grpSpPr>
+        <a:xfrm>
+          <a:off x="0" y="0"/>
+          <a:ext cx="0" cy="0"/>
+          <a:chOff x="0" y="0"/>
+          <a:chExt cx="0" cy="0"/>
+        </a:xfrm>
+      </p:grpSpPr>
+      <p:sp>
+        <p:nvSpPr>
+          <p:cNvPr id="2" name="Title 1">
+            <a:extLst>
+              <a:ext uri="{FF2B5EF4-FFF2-40B4-BE49-F238E27FC236}">
+                <a16:creationId xmlns:a16="http://schemas.microsoft.com/office/drawing/2014/main" id="{9D74A316-4107-DB96-BC5D-50A1FB01B356}"/>
+              </a:ext>
+            </a:extLst>
+          </p:cNvPr>
+          <p:cNvSpPr>
+            <a:spLocks noGrp="1"/>
+          </p:cNvSpPr>
+          <p:nvPr>
+            <p:ph type="title"/>
+          </p:nvPr>
+        </p:nvSpPr>
+        <p:spPr>
+          <a:xfrm>
+            <a:off x="504000" y="394601"/>
+            <a:ext cx="9071640" cy="609398"/>
+          </a:xfrm>
+        </p:spPr>
+        <p:txBody>
+          <a:bodyPr/>
+          <a:lstStyle/>
+          <a:p>
+            <a:r>
+              <a:rPr lang="en-US" dirty="0"/>
+              <a:t>Price vs Vehicle Age</a:t>
+            </a:r>
+          </a:p>
+        </p:txBody>
+      </p:sp>
+      <p:pic>
+        <p:nvPicPr>
+          <p:cNvPr id="5" name="Content Placeholder 4">
+            <a:extLst>
+              <a:ext uri="{FF2B5EF4-FFF2-40B4-BE49-F238E27FC236}">
+                <a16:creationId xmlns:a16="http://schemas.microsoft.com/office/drawing/2014/main" id="{26120E31-61AA-AFEE-9873-6271EDCF79C8}"/>
+              </a:ext>
+            </a:extLst>
+          </p:cNvPr>
+          <p:cNvPicPr>
+            <a:picLocks noGrp="1" noChangeAspect="1"/>
+          </p:cNvPicPr>
+          <p:nvPr>
+            <p:ph/>
+          </p:nvPr>
+        </p:nvPicPr>
+        <p:blipFill>
+          <a:blip r:embed="rId2"/>
+          <a:stretch>
+            <a:fillRect/>
+          </a:stretch>
+        </p:blipFill>
+        <p:spPr>
+          <a:xfrm>
+            <a:off x="401721" y="1424426"/>
+            <a:ext cx="3659494" cy="3287713"/>
+          </a:xfrm>
+          <a:prstGeom prst="rect">
+            <a:avLst/>
+          </a:prstGeom>
+          <a:noFill/>
+          <a:ln w="0">
+            <a:noFill/>
+          </a:ln>
+        </p:spPr>
+      </p:pic>
+      <p:pic>
+        <p:nvPicPr>
+          <p:cNvPr id="7" name="Picture 6">
+            <a:extLst>
+              <a:ext uri="{FF2B5EF4-FFF2-40B4-BE49-F238E27FC236}">
+                <a16:creationId xmlns:a16="http://schemas.microsoft.com/office/drawing/2014/main" id="{B418798A-2AC4-B45F-8AF6-9DB0F15801C6}"/>
+              </a:ext>
+            </a:extLst>
+          </p:cNvPr>
+          <p:cNvPicPr>
+            <a:picLocks noChangeAspect="1"/>
+          </p:cNvPicPr>
+          <p:nvPr/>
+        </p:nvPicPr>
+        <p:blipFill>
+          <a:blip r:embed="rId3"/>
+          <a:stretch>
+            <a:fillRect/>
+          </a:stretch>
+        </p:blipFill>
+        <p:spPr>
+          <a:xfrm>
+            <a:off x="4192947" y="1378085"/>
+            <a:ext cx="5754407" cy="3452644"/>
+          </a:xfrm>
+          <a:prstGeom prst="rect">
+            <a:avLst/>
+          </a:prstGeom>
+        </p:spPr>
+      </p:pic>
+    </p:spTree>
+    <p:extLst>
+      <p:ext uri="{BB962C8B-B14F-4D97-AF65-F5344CB8AC3E}">
+        <p14:creationId xmlns:p14="http://schemas.microsoft.com/office/powerpoint/2010/main" val="2889894660"/>
+      </p:ext>
+    </p:extLst>
+  </p:cSld>
+  <p:clrMapOvr>
+    <a:masterClrMapping/>
+  </p:clrMapOvr>
+</p:sld>
+</file>
+
+<file path=ppt/slides/slide7.xml><?xml version="1.0" encoding="utf-8"?>
+<p:sld xmlns:a="http://schemas.openxmlformats.org/drawingml/2006/main" xmlns:r="http://schemas.openxmlformats.org/officeDocument/2006/relationships" xmlns:p="http://schemas.openxmlformats.org/presentationml/2006/main">
+  <p:cSld>
+    <p:spTree>
+      <p:nvGrpSpPr>
+        <p:cNvPr id="1" name=""/>
+        <p:cNvGrpSpPr/>
+        <p:nvPr/>
+      </p:nvGrpSpPr>
+      <p:grpSpPr>
+        <a:xfrm>
+          <a:off x="0" y="0"/>
+          <a:ext cx="0" cy="0"/>
+          <a:chOff x="0" y="0"/>
+          <a:chExt cx="0" cy="0"/>
+        </a:xfrm>
+      </p:grpSpPr>
+      <p:sp>
+        <p:nvSpPr>
+          <p:cNvPr id="2" name="Title 1">
+            <a:extLst>
+              <a:ext uri="{FF2B5EF4-FFF2-40B4-BE49-F238E27FC236}">
+                <a16:creationId xmlns:a16="http://schemas.microsoft.com/office/drawing/2014/main" id="{3242E8F5-557B-9DAD-9794-688C37F4ADBC}"/>
+              </a:ext>
+            </a:extLst>
+          </p:cNvPr>
+          <p:cNvSpPr>
+            <a:spLocks noGrp="1"/>
+          </p:cNvSpPr>
+          <p:nvPr>
+            <p:ph type="title"/>
+          </p:nvPr>
+        </p:nvSpPr>
+        <p:spPr>
+          <a:xfrm>
+            <a:off x="504000" y="394601"/>
+            <a:ext cx="9071640" cy="609398"/>
+          </a:xfrm>
+        </p:spPr>
+        <p:txBody>
+          <a:bodyPr/>
+          <a:lstStyle/>
+          <a:p>
+            <a:r>
+              <a:rPr lang="en-US" dirty="0"/>
+              <a:t>Price vs Odometer</a:t>
+            </a:r>
+          </a:p>
+        </p:txBody>
+      </p:sp>
+      <p:pic>
+        <p:nvPicPr>
+          <p:cNvPr id="7" name="Picture 6">
+            <a:extLst>
+              <a:ext uri="{FF2B5EF4-FFF2-40B4-BE49-F238E27FC236}">
+                <a16:creationId xmlns:a16="http://schemas.microsoft.com/office/drawing/2014/main" id="{6108C537-04D1-60D5-5FDE-45BF79DEEF5C}"/>
+              </a:ext>
+            </a:extLst>
+          </p:cNvPr>
+          <p:cNvPicPr>
+            <a:picLocks noChangeAspect="1"/>
+          </p:cNvPicPr>
+          <p:nvPr/>
+        </p:nvPicPr>
+        <p:blipFill>
+          <a:blip r:embed="rId2"/>
+          <a:stretch>
+            <a:fillRect/>
+          </a:stretch>
+        </p:blipFill>
+        <p:spPr>
+          <a:xfrm>
+            <a:off x="1053830" y="1003999"/>
+            <a:ext cx="7638656" cy="4583193"/>
+          </a:xfrm>
+          <a:prstGeom prst="rect">
+            <a:avLst/>
+          </a:prstGeom>
+        </p:spPr>
+      </p:pic>
+    </p:spTree>
+    <p:extLst>
+      <p:ext uri="{BB962C8B-B14F-4D97-AF65-F5344CB8AC3E}">
+        <p14:creationId xmlns:p14="http://schemas.microsoft.com/office/powerpoint/2010/main" val="693329973"/>
+      </p:ext>
+    </p:extLst>
+  </p:cSld>
+  <p:clrMapOvr>
+    <a:masterClrMapping/>
+  </p:clrMapOvr>
+</p:sld>
+</file>
+
+<file path=ppt/slides/slide8.xml><?xml version="1.0" encoding="utf-8"?>
+<p:sld xmlns:a="http://schemas.openxmlformats.org/drawingml/2006/main" xmlns:r="http://schemas.openxmlformats.org/officeDocument/2006/relationships" xmlns:p="http://schemas.openxmlformats.org/presentationml/2006/main">
+  <p:cSld>
+    <p:spTree>
+      <p:nvGrpSpPr>
+        <p:cNvPr id="1" name=""/>
+        <p:cNvGrpSpPr/>
+        <p:nvPr/>
+      </p:nvGrpSpPr>
+      <p:grpSpPr>
+        <a:xfrm>
+          <a:off x="0" y="0"/>
+          <a:ext cx="0" cy="0"/>
+          <a:chOff x="0" y="0"/>
+          <a:chExt cx="0" cy="0"/>
+        </a:xfrm>
+      </p:grpSpPr>
+      <p:sp>
+        <p:nvSpPr>
+          <p:cNvPr id="2" name="Title 1">
+            <a:extLst>
+              <a:ext uri="{FF2B5EF4-FFF2-40B4-BE49-F238E27FC236}">
+                <a16:creationId xmlns:a16="http://schemas.microsoft.com/office/drawing/2014/main" id="{B698E8F1-1E21-5630-0A5C-E46B260F81A2}"/>
+              </a:ext>
+            </a:extLst>
+          </p:cNvPr>
+          <p:cNvSpPr>
+            <a:spLocks noGrp="1"/>
+          </p:cNvSpPr>
+          <p:nvPr>
+            <p:ph type="title"/>
+          </p:nvPr>
+        </p:nvSpPr>
+        <p:spPr>
+          <a:xfrm>
+            <a:off x="504000" y="394601"/>
+            <a:ext cx="9071640" cy="609398"/>
+          </a:xfrm>
+        </p:spPr>
+        <p:txBody>
+          <a:bodyPr/>
+          <a:lstStyle/>
+          <a:p>
+            <a:r>
+              <a:rPr lang="en-US" dirty="0"/>
+              <a:t>Non-Model Predictors</a:t>
+            </a:r>
+          </a:p>
+        </p:txBody>
+      </p:sp>
+      <p:pic>
+        <p:nvPicPr>
+          <p:cNvPr id="5" name="Picture 4">
+            <a:extLst>
+              <a:ext uri="{FF2B5EF4-FFF2-40B4-BE49-F238E27FC236}">
+                <a16:creationId xmlns:a16="http://schemas.microsoft.com/office/drawing/2014/main" id="{03EB4434-7BE9-458B-2342-9FDA7FDA687F}"/>
+              </a:ext>
+            </a:extLst>
+          </p:cNvPr>
+          <p:cNvPicPr>
+            <a:picLocks noChangeAspect="1"/>
+          </p:cNvPicPr>
+          <p:nvPr/>
+        </p:nvPicPr>
+        <p:blipFill>
+          <a:blip r:embed="rId2"/>
+          <a:stretch>
+            <a:fillRect/>
+          </a:stretch>
+        </p:blipFill>
+        <p:spPr>
+          <a:xfrm>
+            <a:off x="1229820" y="1607563"/>
+            <a:ext cx="7620000" cy="2857500"/>
+          </a:xfrm>
+          <a:prstGeom prst="rect">
+            <a:avLst/>
+          </a:prstGeom>
+        </p:spPr>
+      </p:pic>
+    </p:spTree>
+    <p:extLst>
+      <p:ext uri="{BB962C8B-B14F-4D97-AF65-F5344CB8AC3E}">
+        <p14:creationId xmlns:p14="http://schemas.microsoft.com/office/powerpoint/2010/main" val="3978901397"/>
+      </p:ext>
+    </p:extLst>
+  </p:cSld>
+  <p:clrMapOvr>
+    <a:masterClrMapping/>
+  </p:clrMapOvr>
+</p:sld>
+</file>
+
+<file path=ppt/slides/slide9.xml><?xml version="1.0" encoding="utf-8"?>
+<p:sld xmlns:a="http://schemas.openxmlformats.org/drawingml/2006/main" xmlns:r="http://schemas.openxmlformats.org/officeDocument/2006/relationships" xmlns:p="http://schemas.openxmlformats.org/presentationml/2006/main">
+  <p:cSld>
+    <p:spTree>
+      <p:nvGrpSpPr>
+        <p:cNvPr id="1" name=""/>
+        <p:cNvGrpSpPr/>
+        <p:nvPr/>
+      </p:nvGrpSpPr>
+      <p:grpSpPr>
+        <a:xfrm>
+          <a:off x="0" y="0"/>
+          <a:ext cx="0" cy="0"/>
+          <a:chOff x="0" y="0"/>
+          <a:chExt cx="0" cy="0"/>
+        </a:xfrm>
+      </p:grpSpPr>
+      <p:sp>
+        <p:nvSpPr>
+          <p:cNvPr id="2" name="Title 1">
+            <a:extLst>
+              <a:ext uri="{FF2B5EF4-FFF2-40B4-BE49-F238E27FC236}">
+                <a16:creationId xmlns:a16="http://schemas.microsoft.com/office/drawing/2014/main" id="{70BBF4EB-D514-FE89-798A-50AF4FFB7C7C}"/>
+              </a:ext>
+            </a:extLst>
+          </p:cNvPr>
+          <p:cNvSpPr>
+            <a:spLocks noGrp="1"/>
+          </p:cNvSpPr>
+          <p:nvPr>
+            <p:ph type="title"/>
+          </p:nvPr>
+        </p:nvSpPr>
+        <p:spPr>
+          <a:xfrm>
+            <a:off x="504000" y="394601"/>
+            <a:ext cx="9071640" cy="609398"/>
+          </a:xfrm>
+        </p:spPr>
+        <p:txBody>
+          <a:bodyPr/>
+          <a:lstStyle/>
+          <a:p>
+            <a:r>
+              <a:rPr lang="en-US" dirty="0"/>
+              <a:t>Other Models &lt; 10</a:t>
+            </a:r>
+          </a:p>
+        </p:txBody>
+      </p:sp>
+      <p:pic>
+        <p:nvPicPr>
+          <p:cNvPr id="7" name="Picture 6">
+            <a:extLst>
+              <a:ext uri="{FF2B5EF4-FFF2-40B4-BE49-F238E27FC236}">
+                <a16:creationId xmlns:a16="http://schemas.microsoft.com/office/drawing/2014/main" id="{BFE1B0D3-0391-881D-7816-4705B9C6D4B5}"/>
+              </a:ext>
+            </a:extLst>
+          </p:cNvPr>
+          <p:cNvPicPr>
+            <a:picLocks noChangeAspect="1"/>
+          </p:cNvPicPr>
+          <p:nvPr/>
+        </p:nvPicPr>
+        <p:blipFill>
+          <a:blip r:embed="rId2"/>
+          <a:stretch>
+            <a:fillRect/>
+          </a:stretch>
+        </p:blipFill>
+        <p:spPr>
+          <a:xfrm>
+            <a:off x="149157" y="1100975"/>
+            <a:ext cx="10080625" cy="4480278"/>
+          </a:xfrm>
+          <a:prstGeom prst="rect">
+            <a:avLst/>
+          </a:prstGeom>
+        </p:spPr>
+      </p:pic>
+    </p:spTree>
+    <p:extLst>
+      <p:ext uri="{BB962C8B-B14F-4D97-AF65-F5344CB8AC3E}">
+        <p14:creationId xmlns:p14="http://schemas.microsoft.com/office/powerpoint/2010/main" val="806480481"/>
+      </p:ext>
+    </p:extLst>
+  </p:cSld>
+  <p:clrMapOvr>
+    <a:masterClrMapping/>
+  </p:clrMapOvr>
 </p:sld>
 </file>
 
 <file path=ppt/theme/theme1.xml><?xml version="1.0" encoding="utf-8"?>
-<a:theme xmlns:a="http://schemas.openxmlformats.org/drawingml/2006/main" xmlns:r="http://schemas.openxmlformats.org/officeDocument/2006/relationships" name="Office">
+<a:theme xmlns:a="http://schemas.openxmlformats.org/drawingml/2006/main" name="Office">
   <a:themeElements>
     <a:clrScheme name="LibreOffice">
       <a:dk1>
@@ -2321,14 +3889,14 @@
     </a:clrScheme>
     <a:fontScheme name="Office">
       <a:majorFont>
-        <a:latin typeface="Arial" pitchFamily="0" charset="1"/>
-        <a:ea typeface="DejaVu Sans" pitchFamily="0" charset="1"/>
-        <a:cs typeface="DejaVu Sans" pitchFamily="0" charset="1"/>
+        <a:latin typeface="Arial"/>
+        <a:ea typeface="DejaVu Sans"/>
+        <a:cs typeface="DejaVu Sans"/>
       </a:majorFont>
       <a:minorFont>
-        <a:latin typeface="Arial" pitchFamily="0" charset="1"/>
-        <a:ea typeface="DejaVu Sans" pitchFamily="0" charset="1"/>
-        <a:cs typeface="DejaVu Sans" pitchFamily="0" charset="1"/>
+        <a:latin typeface="Arial"/>
+        <a:ea typeface="DejaVu Sans"/>
+        <a:cs typeface="DejaVu Sans"/>
       </a:minorFont>
     </a:fontScheme>
     <a:fmtScheme>
@@ -2381,5 +3949,7 @@
       </a:bgFillStyleLst>
     </a:fmtScheme>
   </a:themeElements>
+  <a:objectDefaults/>
+  <a:extraClrSchemeLst/>
 </a:theme>
 </file>